--- a/Education_Presentation.pptx
+++ b/Education_Presentation.pptx
@@ -501,11 +501,11 @@
         </c:ser>
         <c:gapWidth val="150"/>
         <c:overlap val="0"/>
-        <c:axId val="84411996"/>
-        <c:axId val="17436650"/>
+        <c:axId val="58378757"/>
+        <c:axId val="88066785"/>
       </c:barChart>
       <c:catAx>
-        <c:axId val="84411996"/>
+        <c:axId val="58378757"/>
         <c:scaling>
           <c:orientation val="minMax"/>
         </c:scaling>
@@ -537,7 +537,7 @@
             </a:pPr>
           </a:p>
         </c:txPr>
-        <c:crossAx val="17436650"/>
+        <c:crossAx val="88066785"/>
         <c:crosses val="autoZero"/>
         <c:auto val="1"/>
         <c:lblAlgn val="ctr"/>
@@ -545,7 +545,7 @@
         <c:noMultiLvlLbl val="0"/>
       </c:catAx>
       <c:valAx>
-        <c:axId val="17436650"/>
+        <c:axId val="88066785"/>
         <c:scaling>
           <c:orientation val="minMax"/>
           <c:max val="16"/>
@@ -589,7 +589,7 @@
             </a:pPr>
           </a:p>
         </c:txPr>
-        <c:crossAx val="84411996"/>
+        <c:crossAx val="58378757"/>
         <c:crosses val="autoZero"/>
         <c:crossBetween val="between"/>
       </c:valAx>
@@ -762,11 +762,11 @@
         </c:ser>
         <c:gapWidth val="150"/>
         <c:overlap val="0"/>
-        <c:axId val="65564836"/>
-        <c:axId val="48860036"/>
+        <c:axId val="72890873"/>
+        <c:axId val="67818541"/>
       </c:barChart>
       <c:catAx>
-        <c:axId val="65564836"/>
+        <c:axId val="72890873"/>
         <c:scaling>
           <c:orientation val="minMax"/>
         </c:scaling>
@@ -798,7 +798,7 @@
             </a:pPr>
           </a:p>
         </c:txPr>
-        <c:crossAx val="48860036"/>
+        <c:crossAx val="67818541"/>
         <c:crosses val="autoZero"/>
         <c:auto val="1"/>
         <c:lblAlgn val="ctr"/>
@@ -806,7 +806,7 @@
         <c:noMultiLvlLbl val="0"/>
       </c:catAx>
       <c:valAx>
-        <c:axId val="48860036"/>
+        <c:axId val="67818541"/>
         <c:scaling>
           <c:orientation val="minMax"/>
         </c:scaling>
@@ -848,7 +848,7 @@
             </a:pPr>
           </a:p>
         </c:txPr>
-        <c:crossAx val="65564836"/>
+        <c:crossAx val="72890873"/>
         <c:crosses val="autoZero"/>
         <c:crossBetween val="between"/>
       </c:valAx>
@@ -1021,11 +1021,11 @@
         </c:ser>
         <c:gapWidth val="150"/>
         <c:overlap val="0"/>
-        <c:axId val="16935270"/>
-        <c:axId val="65931158"/>
+        <c:axId val="71457427"/>
+        <c:axId val="40556490"/>
       </c:barChart>
       <c:catAx>
-        <c:axId val="16935270"/>
+        <c:axId val="71457427"/>
         <c:scaling>
           <c:orientation val="minMax"/>
         </c:scaling>
@@ -1057,7 +1057,7 @@
             </a:pPr>
           </a:p>
         </c:txPr>
-        <c:crossAx val="65931158"/>
+        <c:crossAx val="40556490"/>
         <c:crosses val="autoZero"/>
         <c:auto val="1"/>
         <c:lblAlgn val="ctr"/>
@@ -1065,7 +1065,7 @@
         <c:noMultiLvlLbl val="0"/>
       </c:catAx>
       <c:valAx>
-        <c:axId val="65931158"/>
+        <c:axId val="40556490"/>
         <c:scaling>
           <c:orientation val="minMax"/>
         </c:scaling>
@@ -1107,7 +1107,7 @@
             </a:pPr>
           </a:p>
         </c:txPr>
-        <c:crossAx val="16935270"/>
+        <c:crossAx val="71457427"/>
         <c:crosses val="autoZero"/>
         <c:crossBetween val="between"/>
       </c:valAx>
@@ -1766,11 +1766,11 @@
         </c:ser>
         <c:gapWidth val="50"/>
         <c:overlap val="100"/>
-        <c:axId val="21623920"/>
-        <c:axId val="3655630"/>
+        <c:axId val="58123835"/>
+        <c:axId val="34905685"/>
       </c:barChart>
       <c:catAx>
-        <c:axId val="21623920"/>
+        <c:axId val="58123835"/>
         <c:scaling>
           <c:orientation val="minMax"/>
         </c:scaling>
@@ -1802,7 +1802,7 @@
             </a:pPr>
           </a:p>
         </c:txPr>
-        <c:crossAx val="3655630"/>
+        <c:crossAx val="34905685"/>
         <c:crosses val="autoZero"/>
         <c:auto val="1"/>
         <c:lblAlgn val="ctr"/>
@@ -1810,7 +1810,7 @@
         <c:noMultiLvlLbl val="0"/>
       </c:catAx>
       <c:valAx>
-        <c:axId val="3655630"/>
+        <c:axId val="34905685"/>
         <c:scaling>
           <c:orientation val="minMax"/>
         </c:scaling>
@@ -1852,7 +1852,7 @@
             </a:pPr>
           </a:p>
         </c:txPr>
-        <c:crossAx val="21623920"/>
+        <c:crossAx val="58123835"/>
         <c:crosses val="autoZero"/>
         <c:crossBetween val="between"/>
       </c:valAx>
@@ -2341,11 +2341,11 @@
         </c:ser>
         <c:gapWidth val="150"/>
         <c:overlap val="0"/>
-        <c:axId val="96481453"/>
-        <c:axId val="74255344"/>
+        <c:axId val="43115756"/>
+        <c:axId val="53925534"/>
       </c:barChart>
       <c:catAx>
-        <c:axId val="96481453"/>
+        <c:axId val="43115756"/>
         <c:scaling>
           <c:orientation val="minMax"/>
         </c:scaling>
@@ -2377,7 +2377,7 @@
             </a:pPr>
           </a:p>
         </c:txPr>
-        <c:crossAx val="74255344"/>
+        <c:crossAx val="53925534"/>
         <c:crosses val="autoZero"/>
         <c:auto val="1"/>
         <c:lblAlgn val="ctr"/>
@@ -2385,7 +2385,7 @@
         <c:noMultiLvlLbl val="0"/>
       </c:catAx>
       <c:valAx>
-        <c:axId val="74255344"/>
+        <c:axId val="53925534"/>
         <c:scaling>
           <c:orientation val="minMax"/>
           <c:max val="51"/>
@@ -2429,7 +2429,7 @@
             </a:pPr>
           </a:p>
         </c:txPr>
-        <c:crossAx val="96481453"/>
+        <c:crossAx val="43115756"/>
         <c:crosses val="autoZero"/>
         <c:crossBetween val="between"/>
       </c:valAx>
@@ -2787,11 +2787,11 @@
         </c:ser>
         <c:gapWidth val="150"/>
         <c:overlap val="0"/>
-        <c:axId val="77459603"/>
-        <c:axId val="61157537"/>
+        <c:axId val="25406795"/>
+        <c:axId val="32343409"/>
       </c:barChart>
       <c:catAx>
-        <c:axId val="77459603"/>
+        <c:axId val="25406795"/>
         <c:scaling>
           <c:orientation val="minMax"/>
         </c:scaling>
@@ -2823,7 +2823,7 @@
             </a:pPr>
           </a:p>
         </c:txPr>
-        <c:crossAx val="61157537"/>
+        <c:crossAx val="32343409"/>
         <c:crosses val="autoZero"/>
         <c:auto val="1"/>
         <c:lblAlgn val="ctr"/>
@@ -2831,7 +2831,7 @@
         <c:noMultiLvlLbl val="0"/>
       </c:catAx>
       <c:valAx>
-        <c:axId val="61157537"/>
+        <c:axId val="32343409"/>
         <c:scaling>
           <c:orientation val="minMax"/>
         </c:scaling>
@@ -2873,7 +2873,7 @@
             </a:pPr>
           </a:p>
         </c:txPr>
-        <c:crossAx val="77459603"/>
+        <c:crossAx val="25406795"/>
         <c:crosses val="autoZero"/>
         <c:crossBetween val="between"/>
       </c:valAx>
@@ -3046,11 +3046,11 @@
         </c:ser>
         <c:gapWidth val="150"/>
         <c:overlap val="0"/>
-        <c:axId val="46899694"/>
-        <c:axId val="4866019"/>
+        <c:axId val="26495201"/>
+        <c:axId val="48223674"/>
       </c:barChart>
       <c:catAx>
-        <c:axId val="46899694"/>
+        <c:axId val="26495201"/>
         <c:scaling>
           <c:orientation val="minMax"/>
         </c:scaling>
@@ -3082,7 +3082,7 @@
             </a:pPr>
           </a:p>
         </c:txPr>
-        <c:crossAx val="4866019"/>
+        <c:crossAx val="48223674"/>
         <c:crosses val="autoZero"/>
         <c:auto val="1"/>
         <c:lblAlgn val="ctr"/>
@@ -3090,7 +3090,7 @@
         <c:noMultiLvlLbl val="0"/>
       </c:catAx>
       <c:valAx>
-        <c:axId val="4866019"/>
+        <c:axId val="48223674"/>
         <c:scaling>
           <c:orientation val="minMax"/>
           <c:max val="72"/>
@@ -3134,7 +3134,7 @@
             </a:pPr>
           </a:p>
         </c:txPr>
-        <c:crossAx val="46899694"/>
+        <c:crossAx val="26495201"/>
         <c:crosses val="autoZero"/>
         <c:crossBetween val="between"/>
       </c:valAx>
@@ -3490,20 +3490,21 @@
             <a:noAutofit/>
           </a:bodyPr>
           <a:p>
+            <a:pPr algn="ctr"/>
             <a:r>
-              <a:rPr b="0" lang="en-US" sz="1800" spc="-1" strike="noStrike">
-                <a:solidFill>
-                  <a:schemeClr val="dk1"/>
-                </a:solidFill>
-                <a:latin typeface="Calibri"/>
+              <a:rPr b="0" lang="en-US" sz="4400" spc="-1" strike="noStrike">
+                <a:solidFill>
+                  <a:srgbClr val="000000"/>
+                </a:solidFill>
+                <a:latin typeface="Arial"/>
               </a:rPr>
               <a:t>Click to move the slide</a:t>
             </a:r>
-            <a:endParaRPr b="0" lang="en-US" sz="1800" spc="-1" strike="noStrike">
-              <a:solidFill>
-                <a:schemeClr val="dk1"/>
-              </a:solidFill>
-              <a:latin typeface="Calibri"/>
+            <a:endParaRPr b="0" lang="en-US" sz="4400" spc="-1" strike="noStrike">
+              <a:solidFill>
+                <a:srgbClr val="000000"/>
+              </a:solidFill>
+              <a:latin typeface="Arial"/>
             </a:endParaRPr>
           </a:p>
         </p:txBody>
@@ -3768,7 +3769,7 @@
             <a:pPr indent="0" algn="r">
               <a:buNone/>
             </a:pPr>
-            <a:fld id="{AA68EF1D-AA2B-4CC3-B8D4-C0E86F5F06C6}" type="slidenum">
+            <a:fld id="{74F5C5A7-DD88-4962-A6C9-BBD589277DB6}" type="slidenum">
               <a:rPr b="0" lang="en-US" sz="1400" spc="-1" strike="noStrike">
                 <a:solidFill>
                   <a:srgbClr val="000000"/>
@@ -3822,7 +3823,7 @@
         <p:spPr>
           <a:xfrm>
             <a:off x="685800" y="1143000"/>
-            <a:ext cx="5486040" cy="3085920"/>
+            <a:ext cx="5485680" cy="3085560"/>
           </a:xfrm>
           <a:prstGeom prst="rect">
             <a:avLst/>
@@ -3845,7 +3846,7 @@
         <p:spPr>
           <a:xfrm>
             <a:off x="685800" y="4400640"/>
-            <a:ext cx="5486040" cy="3600000"/>
+            <a:ext cx="5485680" cy="3599640"/>
           </a:xfrm>
           <a:prstGeom prst="rect">
             <a:avLst/>
@@ -3885,7 +3886,7 @@
         <p:spPr>
           <a:xfrm>
             <a:off x="3884760" y="8685360"/>
-            <a:ext cx="2971440" cy="458280"/>
+            <a:ext cx="2971080" cy="457920"/>
           </a:xfrm>
           <a:prstGeom prst="rect">
             <a:avLst/>
@@ -3905,6 +3906,9 @@
                 <a:spcPct val="100000"/>
               </a:lnSpc>
               <a:buNone/>
+              <a:tabLst>
+                <a:tab algn="l" pos="0"/>
+              </a:tabLst>
               <a:defRPr b="0" lang="en-US" sz="1200" spc="-1" strike="noStrike">
                 <a:solidFill>
                   <a:schemeClr val="dk1"/>
@@ -3920,8 +3924,11 @@
                 <a:spcPct val="100000"/>
               </a:lnSpc>
               <a:buNone/>
-            </a:pPr>
-            <a:fld id="{9A77FC0D-D14D-4477-96BB-86832E85C9EC}" type="slidenum">
+              <a:tabLst>
+                <a:tab algn="l" pos="0"/>
+              </a:tabLst>
+            </a:pPr>
+            <a:fld id="{3310EC50-70CB-4CD2-819C-5585BEE5A586}" type="slidenum">
               <a:rPr b="0" lang="en-US" sz="1200" spc="-1" strike="noStrike">
                 <a:solidFill>
                   <a:schemeClr val="dk1"/>
@@ -3975,7 +3982,7 @@
         <p:spPr>
           <a:xfrm>
             <a:off x="685800" y="1143000"/>
-            <a:ext cx="5486040" cy="3085920"/>
+            <a:ext cx="5485680" cy="3085560"/>
           </a:xfrm>
           <a:prstGeom prst="rect">
             <a:avLst/>
@@ -3998,7 +4005,7 @@
         <p:spPr>
           <a:xfrm>
             <a:off x="685800" y="4400640"/>
-            <a:ext cx="5486040" cy="3600000"/>
+            <a:ext cx="5485680" cy="3599640"/>
           </a:xfrm>
           <a:prstGeom prst="rect">
             <a:avLst/>
@@ -4038,7 +4045,7 @@
         <p:spPr>
           <a:xfrm>
             <a:off x="3884760" y="8685360"/>
-            <a:ext cx="2971440" cy="458280"/>
+            <a:ext cx="2971080" cy="457920"/>
           </a:xfrm>
           <a:prstGeom prst="rect">
             <a:avLst/>
@@ -4058,6 +4065,9 @@
                 <a:spcPct val="100000"/>
               </a:lnSpc>
               <a:buNone/>
+              <a:tabLst>
+                <a:tab algn="l" pos="0"/>
+              </a:tabLst>
               <a:defRPr b="0" lang="en-US" sz="1200" spc="-1" strike="noStrike">
                 <a:solidFill>
                   <a:schemeClr val="dk1"/>
@@ -4073,8 +4083,11 @@
                 <a:spcPct val="100000"/>
               </a:lnSpc>
               <a:buNone/>
-            </a:pPr>
-            <a:fld id="{9635F7B4-F455-41A8-8E05-28F66FBD8F0E}" type="slidenum">
+              <a:tabLst>
+                <a:tab algn="l" pos="0"/>
+              </a:tabLst>
+            </a:pPr>
+            <a:fld id="{F4A1DEB9-1DCA-4C9D-B986-007AD142A345}" type="slidenum">
               <a:rPr b="0" lang="en-US" sz="1200" spc="-1" strike="noStrike">
                 <a:solidFill>
                   <a:schemeClr val="dk1"/>
@@ -4128,7 +4141,7 @@
         <p:spPr>
           <a:xfrm>
             <a:off x="685800" y="1143000"/>
-            <a:ext cx="5486040" cy="3085920"/>
+            <a:ext cx="5485680" cy="3085560"/>
           </a:xfrm>
           <a:prstGeom prst="rect">
             <a:avLst/>
@@ -4151,7 +4164,7 @@
         <p:spPr>
           <a:xfrm>
             <a:off x="685800" y="4400640"/>
-            <a:ext cx="5486040" cy="3600000"/>
+            <a:ext cx="5485680" cy="3599640"/>
           </a:xfrm>
           <a:prstGeom prst="rect">
             <a:avLst/>
@@ -4191,7 +4204,7 @@
         <p:spPr>
           <a:xfrm>
             <a:off x="3884760" y="8685360"/>
-            <a:ext cx="2971440" cy="458280"/>
+            <a:ext cx="2971080" cy="457920"/>
           </a:xfrm>
           <a:prstGeom prst="rect">
             <a:avLst/>
@@ -4211,6 +4224,9 @@
                 <a:spcPct val="100000"/>
               </a:lnSpc>
               <a:buNone/>
+              <a:tabLst>
+                <a:tab algn="l" pos="0"/>
+              </a:tabLst>
               <a:defRPr b="0" lang="en-US" sz="1200" spc="-1" strike="noStrike">
                 <a:solidFill>
                   <a:schemeClr val="dk1"/>
@@ -4226,8 +4242,11 @@
                 <a:spcPct val="100000"/>
               </a:lnSpc>
               <a:buNone/>
-            </a:pPr>
-            <a:fld id="{F4B78BF7-8BBE-4555-A43B-8E6683D1ECD8}" type="slidenum">
+              <a:tabLst>
+                <a:tab algn="l" pos="0"/>
+              </a:tabLst>
+            </a:pPr>
+            <a:fld id="{6D3CD4E6-050F-45E3-9CDD-238C391632BF}" type="slidenum">
               <a:rPr b="0" lang="en-US" sz="1200" spc="-1" strike="noStrike">
                 <a:solidFill>
                   <a:schemeClr val="dk1"/>
@@ -4281,7 +4300,7 @@
         <p:spPr>
           <a:xfrm>
             <a:off x="685800" y="1143000"/>
-            <a:ext cx="5486040" cy="3085920"/>
+            <a:ext cx="5485680" cy="3085560"/>
           </a:xfrm>
           <a:prstGeom prst="rect">
             <a:avLst/>
@@ -4304,7 +4323,7 @@
         <p:spPr>
           <a:xfrm>
             <a:off x="685800" y="4400640"/>
-            <a:ext cx="5486040" cy="3600000"/>
+            <a:ext cx="5485680" cy="3599640"/>
           </a:xfrm>
           <a:prstGeom prst="rect">
             <a:avLst/>
@@ -4344,7 +4363,7 @@
         <p:spPr>
           <a:xfrm>
             <a:off x="3884760" y="8685360"/>
-            <a:ext cx="2971440" cy="458280"/>
+            <a:ext cx="2971080" cy="457920"/>
           </a:xfrm>
           <a:prstGeom prst="rect">
             <a:avLst/>
@@ -4364,6 +4383,9 @@
                 <a:spcPct val="100000"/>
               </a:lnSpc>
               <a:buNone/>
+              <a:tabLst>
+                <a:tab algn="l" pos="0"/>
+              </a:tabLst>
               <a:defRPr b="0" lang="en-US" sz="1200" spc="-1" strike="noStrike">
                 <a:solidFill>
                   <a:schemeClr val="dk1"/>
@@ -4379,8 +4401,11 @@
                 <a:spcPct val="100000"/>
               </a:lnSpc>
               <a:buNone/>
-            </a:pPr>
-            <a:fld id="{89A5C627-03AD-44E2-A978-87DA22D5319C}" type="slidenum">
+              <a:tabLst>
+                <a:tab algn="l" pos="0"/>
+              </a:tabLst>
+            </a:pPr>
+            <a:fld id="{16CEBF0B-554B-492A-96A0-AAA0A0D95A10}" type="slidenum">
               <a:rPr b="0" lang="en-US" sz="1200" spc="-1" strike="noStrike">
                 <a:solidFill>
                   <a:schemeClr val="dk1"/>
@@ -4434,7 +4459,7 @@
         <p:spPr>
           <a:xfrm>
             <a:off x="685800" y="1143000"/>
-            <a:ext cx="5486040" cy="3085920"/>
+            <a:ext cx="5485680" cy="3085560"/>
           </a:xfrm>
           <a:prstGeom prst="rect">
             <a:avLst/>
@@ -4457,7 +4482,7 @@
         <p:spPr>
           <a:xfrm>
             <a:off x="685800" y="4400640"/>
-            <a:ext cx="5486040" cy="3600000"/>
+            <a:ext cx="5485680" cy="3599640"/>
           </a:xfrm>
           <a:prstGeom prst="rect">
             <a:avLst/>
@@ -4497,7 +4522,7 @@
         <p:spPr>
           <a:xfrm>
             <a:off x="3884760" y="8685360"/>
-            <a:ext cx="2971440" cy="458280"/>
+            <a:ext cx="2971080" cy="457920"/>
           </a:xfrm>
           <a:prstGeom prst="rect">
             <a:avLst/>
@@ -4517,6 +4542,9 @@
                 <a:spcPct val="100000"/>
               </a:lnSpc>
               <a:buNone/>
+              <a:tabLst>
+                <a:tab algn="l" pos="0"/>
+              </a:tabLst>
               <a:defRPr b="0" lang="en-US" sz="1200" spc="-1" strike="noStrike">
                 <a:solidFill>
                   <a:schemeClr val="dk1"/>
@@ -4532,8 +4560,11 @@
                 <a:spcPct val="100000"/>
               </a:lnSpc>
               <a:buNone/>
-            </a:pPr>
-            <a:fld id="{8EC9BBEE-4AB0-4ADB-AF77-70ED17852C8B}" type="slidenum">
+              <a:tabLst>
+                <a:tab algn="l" pos="0"/>
+              </a:tabLst>
+            </a:pPr>
+            <a:fld id="{7BA6EDB4-D4AD-4A7A-8BBB-46B1C6C4D6F1}" type="slidenum">
               <a:rPr b="0" lang="en-US" sz="1200" spc="-1" strike="noStrike">
                 <a:solidFill>
                   <a:schemeClr val="dk1"/>
@@ -4587,7 +4618,7 @@
         <p:spPr>
           <a:xfrm>
             <a:off x="685800" y="1143000"/>
-            <a:ext cx="5486040" cy="3085920"/>
+            <a:ext cx="5485680" cy="3085560"/>
           </a:xfrm>
           <a:prstGeom prst="rect">
             <a:avLst/>
@@ -4610,7 +4641,7 @@
         <p:spPr>
           <a:xfrm>
             <a:off x="685800" y="4400640"/>
-            <a:ext cx="5486040" cy="3600000"/>
+            <a:ext cx="5485680" cy="3599640"/>
           </a:xfrm>
           <a:prstGeom prst="rect">
             <a:avLst/>
@@ -4650,7 +4681,7 @@
         <p:spPr>
           <a:xfrm>
             <a:off x="3884760" y="8685360"/>
-            <a:ext cx="2971440" cy="458280"/>
+            <a:ext cx="2971080" cy="457920"/>
           </a:xfrm>
           <a:prstGeom prst="rect">
             <a:avLst/>
@@ -4670,6 +4701,9 @@
                 <a:spcPct val="100000"/>
               </a:lnSpc>
               <a:buNone/>
+              <a:tabLst>
+                <a:tab algn="l" pos="0"/>
+              </a:tabLst>
               <a:defRPr b="0" lang="en-US" sz="1200" spc="-1" strike="noStrike">
                 <a:solidFill>
                   <a:schemeClr val="dk1"/>
@@ -4685,8 +4719,11 @@
                 <a:spcPct val="100000"/>
               </a:lnSpc>
               <a:buNone/>
-            </a:pPr>
-            <a:fld id="{BBF82C2E-67F9-4193-A2C7-9A11535819C6}" type="slidenum">
+              <a:tabLst>
+                <a:tab algn="l" pos="0"/>
+              </a:tabLst>
+            </a:pPr>
+            <a:fld id="{5C97A4DF-3FB0-48E1-BAF3-BC9298243564}" type="slidenum">
               <a:rPr b="0" lang="en-US" sz="1200" spc="-1" strike="noStrike">
                 <a:solidFill>
                   <a:schemeClr val="dk1"/>
@@ -4740,7 +4777,7 @@
         <p:spPr>
           <a:xfrm>
             <a:off x="685800" y="1143000"/>
-            <a:ext cx="5486040" cy="3085920"/>
+            <a:ext cx="5485680" cy="3085560"/>
           </a:xfrm>
           <a:prstGeom prst="rect">
             <a:avLst/>
@@ -4763,7 +4800,7 @@
         <p:spPr>
           <a:xfrm>
             <a:off x="685800" y="4400640"/>
-            <a:ext cx="5486040" cy="3600000"/>
+            <a:ext cx="5485680" cy="3599640"/>
           </a:xfrm>
           <a:prstGeom prst="rect">
             <a:avLst/>
@@ -4803,7 +4840,7 @@
         <p:spPr>
           <a:xfrm>
             <a:off x="3884760" y="8685360"/>
-            <a:ext cx="2971440" cy="458280"/>
+            <a:ext cx="2971080" cy="457920"/>
           </a:xfrm>
           <a:prstGeom prst="rect">
             <a:avLst/>
@@ -4823,6 +4860,9 @@
                 <a:spcPct val="100000"/>
               </a:lnSpc>
               <a:buNone/>
+              <a:tabLst>
+                <a:tab algn="l" pos="0"/>
+              </a:tabLst>
               <a:defRPr b="0" lang="en-US" sz="1200" spc="-1" strike="noStrike">
                 <a:solidFill>
                   <a:schemeClr val="dk1"/>
@@ -4838,8 +4878,11 @@
                 <a:spcPct val="100000"/>
               </a:lnSpc>
               <a:buNone/>
-            </a:pPr>
-            <a:fld id="{7968739F-7FCC-41D8-95A5-7B87E81CE9F3}" type="slidenum">
+              <a:tabLst>
+                <a:tab algn="l" pos="0"/>
+              </a:tabLst>
+            </a:pPr>
+            <a:fld id="{02DB723B-06F4-480E-91F6-7E4534BE9F77}" type="slidenum">
               <a:rPr b="0" lang="en-US" sz="1200" spc="-1" strike="noStrike">
                 <a:solidFill>
                   <a:schemeClr val="dk1"/>
@@ -4893,7 +4936,7 @@
         <p:spPr>
           <a:xfrm>
             <a:off x="685800" y="1143000"/>
-            <a:ext cx="5486040" cy="3085920"/>
+            <a:ext cx="5485680" cy="3085560"/>
           </a:xfrm>
           <a:prstGeom prst="rect">
             <a:avLst/>
@@ -4916,7 +4959,7 @@
         <p:spPr>
           <a:xfrm>
             <a:off x="685800" y="4400640"/>
-            <a:ext cx="5486040" cy="3600000"/>
+            <a:ext cx="5485680" cy="3599640"/>
           </a:xfrm>
           <a:prstGeom prst="rect">
             <a:avLst/>
@@ -4956,7 +4999,7 @@
         <p:spPr>
           <a:xfrm>
             <a:off x="3884760" y="8685360"/>
-            <a:ext cx="2971440" cy="458280"/>
+            <a:ext cx="2971080" cy="457920"/>
           </a:xfrm>
           <a:prstGeom prst="rect">
             <a:avLst/>
@@ -4976,6 +5019,9 @@
                 <a:spcPct val="100000"/>
               </a:lnSpc>
               <a:buNone/>
+              <a:tabLst>
+                <a:tab algn="l" pos="0"/>
+              </a:tabLst>
               <a:defRPr b="0" lang="en-US" sz="1200" spc="-1" strike="noStrike">
                 <a:solidFill>
                   <a:schemeClr val="dk1"/>
@@ -4991,8 +5037,11 @@
                 <a:spcPct val="100000"/>
               </a:lnSpc>
               <a:buNone/>
-            </a:pPr>
-            <a:fld id="{090E14E1-0168-47BB-AC98-BA1E2ABEDD2B}" type="slidenum">
+              <a:tabLst>
+                <a:tab algn="l" pos="0"/>
+              </a:tabLst>
+            </a:pPr>
+            <a:fld id="{EAE51BF6-9C81-4D4B-B77F-4907E4D698C4}" type="slidenum">
               <a:rPr b="0" lang="en-US" sz="1200" spc="-1" strike="noStrike">
                 <a:solidFill>
                   <a:schemeClr val="dk1"/>
@@ -5046,7 +5095,7 @@
         <p:spPr>
           <a:xfrm>
             <a:off x="685800" y="1143000"/>
-            <a:ext cx="5486040" cy="3085920"/>
+            <a:ext cx="5485680" cy="3085560"/>
           </a:xfrm>
           <a:prstGeom prst="rect">
             <a:avLst/>
@@ -5069,7 +5118,7 @@
         <p:spPr>
           <a:xfrm>
             <a:off x="685800" y="4400640"/>
-            <a:ext cx="5486040" cy="3600000"/>
+            <a:ext cx="5485680" cy="3599640"/>
           </a:xfrm>
           <a:prstGeom prst="rect">
             <a:avLst/>
@@ -5109,7 +5158,7 @@
         <p:spPr>
           <a:xfrm>
             <a:off x="3884760" y="8685360"/>
-            <a:ext cx="2971440" cy="458280"/>
+            <a:ext cx="2971080" cy="457920"/>
           </a:xfrm>
           <a:prstGeom prst="rect">
             <a:avLst/>
@@ -5129,6 +5178,9 @@
                 <a:spcPct val="100000"/>
               </a:lnSpc>
               <a:buNone/>
+              <a:tabLst>
+                <a:tab algn="l" pos="0"/>
+              </a:tabLst>
               <a:defRPr b="0" lang="en-US" sz="1200" spc="-1" strike="noStrike">
                 <a:solidFill>
                   <a:schemeClr val="dk1"/>
@@ -5144,8 +5196,11 @@
                 <a:spcPct val="100000"/>
               </a:lnSpc>
               <a:buNone/>
-            </a:pPr>
-            <a:fld id="{663DB19A-6303-4C1B-82EC-671143916836}" type="slidenum">
+              <a:tabLst>
+                <a:tab algn="l" pos="0"/>
+              </a:tabLst>
+            </a:pPr>
+            <a:fld id="{A7D4E205-4F47-4411-AC42-C638D059D969}" type="slidenum">
               <a:rPr b="0" lang="en-US" sz="1200" spc="-1" strike="noStrike">
                 <a:solidFill>
                   <a:schemeClr val="dk1"/>
@@ -5199,7 +5254,7 @@
         <p:spPr>
           <a:xfrm>
             <a:off x="685800" y="1143000"/>
-            <a:ext cx="5486040" cy="3085920"/>
+            <a:ext cx="5485680" cy="3085560"/>
           </a:xfrm>
           <a:prstGeom prst="rect">
             <a:avLst/>
@@ -5222,7 +5277,7 @@
         <p:spPr>
           <a:xfrm>
             <a:off x="685800" y="4400640"/>
-            <a:ext cx="5486040" cy="3600000"/>
+            <a:ext cx="5485680" cy="3599640"/>
           </a:xfrm>
           <a:prstGeom prst="rect">
             <a:avLst/>
@@ -5262,7 +5317,7 @@
         <p:spPr>
           <a:xfrm>
             <a:off x="3884760" y="8685360"/>
-            <a:ext cx="2971440" cy="458280"/>
+            <a:ext cx="2971080" cy="457920"/>
           </a:xfrm>
           <a:prstGeom prst="rect">
             <a:avLst/>
@@ -5282,6 +5337,9 @@
                 <a:spcPct val="100000"/>
               </a:lnSpc>
               <a:buNone/>
+              <a:tabLst>
+                <a:tab algn="l" pos="0"/>
+              </a:tabLst>
               <a:defRPr b="0" lang="en-US" sz="1200" spc="-1" strike="noStrike">
                 <a:solidFill>
                   <a:schemeClr val="dk1"/>
@@ -5297,8 +5355,11 @@
                 <a:spcPct val="100000"/>
               </a:lnSpc>
               <a:buNone/>
-            </a:pPr>
-            <a:fld id="{FB3CCD46-C373-4E93-AD14-EB94BD4A1530}" type="slidenum">
+              <a:tabLst>
+                <a:tab algn="l" pos="0"/>
+              </a:tabLst>
+            </a:pPr>
+            <a:fld id="{EA740679-A0F3-40E4-898C-AB1BA1F50379}" type="slidenum">
               <a:rPr b="0" lang="en-US" sz="1200" spc="-1" strike="noStrike">
                 <a:solidFill>
                   <a:schemeClr val="dk1"/>
@@ -5352,7 +5413,7 @@
         <p:spPr>
           <a:xfrm>
             <a:off x="685800" y="1143000"/>
-            <a:ext cx="5486040" cy="3085920"/>
+            <a:ext cx="5485680" cy="3085560"/>
           </a:xfrm>
           <a:prstGeom prst="rect">
             <a:avLst/>
@@ -5375,7 +5436,7 @@
         <p:spPr>
           <a:xfrm>
             <a:off x="685800" y="4400640"/>
-            <a:ext cx="5486040" cy="3600000"/>
+            <a:ext cx="5485680" cy="3599640"/>
           </a:xfrm>
           <a:prstGeom prst="rect">
             <a:avLst/>
@@ -5415,7 +5476,7 @@
         <p:spPr>
           <a:xfrm>
             <a:off x="3884760" y="8685360"/>
-            <a:ext cx="2971440" cy="458280"/>
+            <a:ext cx="2971080" cy="457920"/>
           </a:xfrm>
           <a:prstGeom prst="rect">
             <a:avLst/>
@@ -5435,6 +5496,9 @@
                 <a:spcPct val="100000"/>
               </a:lnSpc>
               <a:buNone/>
+              <a:tabLst>
+                <a:tab algn="l" pos="0"/>
+              </a:tabLst>
               <a:defRPr b="0" lang="en-US" sz="1200" spc="-1" strike="noStrike">
                 <a:solidFill>
                   <a:schemeClr val="dk1"/>
@@ -5450,8 +5514,11 @@
                 <a:spcPct val="100000"/>
               </a:lnSpc>
               <a:buNone/>
-            </a:pPr>
-            <a:fld id="{A14A3DB7-DD64-407D-9E69-46F9D483C368}" type="slidenum">
+              <a:tabLst>
+                <a:tab algn="l" pos="0"/>
+              </a:tabLst>
+            </a:pPr>
+            <a:fld id="{54581946-9D4D-48A2-9424-CF4F5EB750FA}" type="slidenum">
               <a:rPr b="0" lang="en-US" sz="1200" spc="-1" strike="noStrike">
                 <a:solidFill>
                   <a:schemeClr val="dk1"/>
@@ -5549,23 +5616,23 @@
             <a:noAutofit/>
           </a:bodyPr>
           <a:p>
-            <a:pPr indent="0">
+            <a:pPr indent="0" algn="ctr">
               <a:buNone/>
             </a:pPr>
             <a:r>
-              <a:rPr b="0" lang="en-US" sz="1800" spc="-1" strike="noStrike">
-                <a:solidFill>
-                  <a:schemeClr val="dk1"/>
-                </a:solidFill>
-                <a:latin typeface="Calibri"/>
+              <a:rPr b="0" lang="en-US" sz="4400" spc="-1" strike="noStrike">
+                <a:solidFill>
+                  <a:srgbClr val="000000"/>
+                </a:solidFill>
+                <a:latin typeface="Arial"/>
               </a:rPr>
               <a:t>Click to edit the title text format</a:t>
             </a:r>
-            <a:endParaRPr b="0" lang="en-US" sz="1800" spc="-1" strike="noStrike">
-              <a:solidFill>
-                <a:schemeClr val="dk1"/>
-              </a:solidFill>
-              <a:latin typeface="Calibri"/>
+            <a:endParaRPr b="0" lang="en-US" sz="4400" spc="-1" strike="noStrike">
+              <a:solidFill>
+                <a:srgbClr val="000000"/>
+              </a:solidFill>
+              <a:latin typeface="Arial"/>
             </a:endParaRPr>
           </a:p>
         </p:txBody>
@@ -5612,17 +5679,17 @@
             <a:r>
               <a:rPr b="0" lang="en-US" sz="3200" spc="-1" strike="noStrike">
                 <a:solidFill>
-                  <a:schemeClr val="dk1"/>
-                </a:solidFill>
-                <a:latin typeface="Calibri"/>
+                  <a:srgbClr val="000000"/>
+                </a:solidFill>
+                <a:latin typeface="Arial"/>
               </a:rPr>
               <a:t>Click to edit the outline text format</a:t>
             </a:r>
             <a:endParaRPr b="0" lang="en-US" sz="3200" spc="-1" strike="noStrike">
               <a:solidFill>
-                <a:schemeClr val="dk1"/>
-              </a:solidFill>
-              <a:latin typeface="Calibri"/>
+                <a:srgbClr val="000000"/>
+              </a:solidFill>
+              <a:latin typeface="Arial"/>
             </a:endParaRPr>
           </a:p>
           <a:p>
@@ -5638,19 +5705,19 @@
               <a:buChar char=""/>
             </a:pPr>
             <a:r>
-              <a:rPr b="0" lang="en-US" sz="2400" spc="-1" strike="noStrike">
-                <a:solidFill>
-                  <a:schemeClr val="dk1"/>
-                </a:solidFill>
-                <a:latin typeface="Calibri"/>
+              <a:rPr b="0" lang="en-US" sz="2800" spc="-1" strike="noStrike">
+                <a:solidFill>
+                  <a:srgbClr val="000000"/>
+                </a:solidFill>
+                <a:latin typeface="Arial"/>
               </a:rPr>
               <a:t>Second Outline Level</a:t>
             </a:r>
-            <a:endParaRPr b="0" lang="en-US" sz="2400" spc="-1" strike="noStrike">
-              <a:solidFill>
-                <a:schemeClr val="dk1"/>
-              </a:solidFill>
-              <a:latin typeface="Calibri"/>
+            <a:endParaRPr b="0" lang="en-US" sz="2800" spc="-1" strike="noStrike">
+              <a:solidFill>
+                <a:srgbClr val="000000"/>
+              </a:solidFill>
+              <a:latin typeface="Arial"/>
             </a:endParaRPr>
           </a:p>
           <a:p>
@@ -5666,19 +5733,19 @@
               <a:buChar char=""/>
             </a:pPr>
             <a:r>
-              <a:rPr b="0" lang="en-US" sz="2000" spc="-1" strike="noStrike">
-                <a:solidFill>
-                  <a:schemeClr val="dk1"/>
-                </a:solidFill>
-                <a:latin typeface="Calibri"/>
+              <a:rPr b="0" lang="en-US" sz="2400" spc="-1" strike="noStrike">
+                <a:solidFill>
+                  <a:srgbClr val="000000"/>
+                </a:solidFill>
+                <a:latin typeface="Arial"/>
               </a:rPr>
               <a:t>Third Outline Level</a:t>
             </a:r>
-            <a:endParaRPr b="0" lang="en-US" sz="2000" spc="-1" strike="noStrike">
-              <a:solidFill>
-                <a:schemeClr val="dk1"/>
-              </a:solidFill>
-              <a:latin typeface="Calibri"/>
+            <a:endParaRPr b="0" lang="en-US" sz="2400" spc="-1" strike="noStrike">
+              <a:solidFill>
+                <a:srgbClr val="000000"/>
+              </a:solidFill>
+              <a:latin typeface="Arial"/>
             </a:endParaRPr>
           </a:p>
           <a:p>
@@ -5696,17 +5763,17 @@
             <a:r>
               <a:rPr b="0" lang="en-US" sz="2000" spc="-1" strike="noStrike">
                 <a:solidFill>
-                  <a:schemeClr val="dk1"/>
-                </a:solidFill>
-                <a:latin typeface="Calibri"/>
+                  <a:srgbClr val="000000"/>
+                </a:solidFill>
+                <a:latin typeface="Arial"/>
               </a:rPr>
               <a:t>Fourth Outline Level</a:t>
             </a:r>
             <a:endParaRPr b="0" lang="en-US" sz="2000" spc="-1" strike="noStrike">
               <a:solidFill>
-                <a:schemeClr val="dk1"/>
-              </a:solidFill>
-              <a:latin typeface="Calibri"/>
+                <a:srgbClr val="000000"/>
+              </a:solidFill>
+              <a:latin typeface="Arial"/>
             </a:endParaRPr>
           </a:p>
           <a:p>
@@ -5724,17 +5791,17 @@
             <a:r>
               <a:rPr b="0" lang="en-US" sz="2000" spc="-1" strike="noStrike">
                 <a:solidFill>
-                  <a:schemeClr val="dk1"/>
-                </a:solidFill>
-                <a:latin typeface="Calibri"/>
+                  <a:srgbClr val="000000"/>
+                </a:solidFill>
+                <a:latin typeface="Arial"/>
               </a:rPr>
               <a:t>Fifth Outline Level</a:t>
             </a:r>
             <a:endParaRPr b="0" lang="en-US" sz="2000" spc="-1" strike="noStrike">
               <a:solidFill>
-                <a:schemeClr val="dk1"/>
-              </a:solidFill>
-              <a:latin typeface="Calibri"/>
+                <a:srgbClr val="000000"/>
+              </a:solidFill>
+              <a:latin typeface="Arial"/>
             </a:endParaRPr>
           </a:p>
           <a:p>
@@ -5752,17 +5819,17 @@
             <a:r>
               <a:rPr b="0" lang="en-US" sz="2000" spc="-1" strike="noStrike">
                 <a:solidFill>
-                  <a:schemeClr val="dk1"/>
-                </a:solidFill>
-                <a:latin typeface="Calibri"/>
+                  <a:srgbClr val="000000"/>
+                </a:solidFill>
+                <a:latin typeface="Arial"/>
               </a:rPr>
               <a:t>Sixth Outline Level</a:t>
             </a:r>
             <a:endParaRPr b="0" lang="en-US" sz="2000" spc="-1" strike="noStrike">
               <a:solidFill>
-                <a:schemeClr val="dk1"/>
-              </a:solidFill>
-              <a:latin typeface="Calibri"/>
+                <a:srgbClr val="000000"/>
+              </a:solidFill>
+              <a:latin typeface="Arial"/>
             </a:endParaRPr>
           </a:p>
           <a:p>
@@ -5780,17 +5847,17 @@
             <a:r>
               <a:rPr b="0" lang="en-US" sz="2000" spc="-1" strike="noStrike">
                 <a:solidFill>
-                  <a:schemeClr val="dk1"/>
-                </a:solidFill>
-                <a:latin typeface="Calibri"/>
+                  <a:srgbClr val="000000"/>
+                </a:solidFill>
+                <a:latin typeface="Arial"/>
               </a:rPr>
               <a:t>Seventh Outline Level</a:t>
             </a:r>
             <a:endParaRPr b="0" lang="en-US" sz="2000" spc="-1" strike="noStrike">
               <a:solidFill>
-                <a:schemeClr val="dk1"/>
-              </a:solidFill>
-              <a:latin typeface="Calibri"/>
+                <a:srgbClr val="000000"/>
+              </a:solidFill>
+              <a:latin typeface="Arial"/>
             </a:endParaRPr>
           </a:p>
         </p:txBody>
@@ -5837,7 +5904,7 @@
         <p:spPr>
           <a:xfrm>
             <a:off x="0" y="0"/>
-            <a:ext cx="3474360" cy="5143320"/>
+            <a:ext cx="3474000" cy="5142960"/>
           </a:xfrm>
           <a:prstGeom prst="rect">
             <a:avLst/>
@@ -5863,6 +5930,11 @@
             <a:noAutofit/>
           </a:bodyPr>
           <a:p>
+            <a:pPr>
+              <a:lnSpc>
+                <a:spcPct val="100000"/>
+              </a:lnSpc>
+            </a:pPr>
             <a:endParaRPr b="0" lang="en-US" sz="1800" spc="-1" strike="noStrike">
               <a:solidFill>
                 <a:srgbClr val="ffffff"/>
@@ -5881,7 +5953,7 @@
         <p:spPr>
           <a:xfrm>
             <a:off x="3474720" y="0"/>
-            <a:ext cx="54360" cy="5143320"/>
+            <a:ext cx="54000" cy="5142960"/>
           </a:xfrm>
           <a:prstGeom prst="rect">
             <a:avLst/>
@@ -5907,6 +5979,11 @@
             <a:noAutofit/>
           </a:bodyPr>
           <a:p>
+            <a:pPr>
+              <a:lnSpc>
+                <a:spcPct val="100000"/>
+              </a:lnSpc>
+            </a:pPr>
             <a:endParaRPr b="0" lang="en-US" sz="1800" spc="-1" strike="noStrike">
               <a:solidFill>
                 <a:srgbClr val="ffffff"/>
@@ -5925,7 +6002,7 @@
         <p:spPr>
           <a:xfrm>
             <a:off x="274320" y="822960"/>
-            <a:ext cx="2925720" cy="1005480"/>
+            <a:ext cx="2925360" cy="1005120"/>
           </a:xfrm>
           <a:prstGeom prst="rect">
             <a:avLst/>
@@ -5982,7 +6059,7 @@
         <p:spPr>
           <a:xfrm>
             <a:off x="182880" y="1874520"/>
-            <a:ext cx="3108600" cy="1919880"/>
+            <a:ext cx="3108240" cy="1919520"/>
           </a:xfrm>
           <a:prstGeom prst="rect">
             <a:avLst/>
@@ -6091,7 +6168,7 @@
         <p:spPr>
           <a:xfrm>
             <a:off x="3749040" y="1280160"/>
-            <a:ext cx="5120280" cy="548280"/>
+            <a:ext cx="5119920" cy="547920"/>
           </a:xfrm>
           <a:prstGeom prst="rect">
             <a:avLst/>
@@ -6148,7 +6225,7 @@
         <p:spPr>
           <a:xfrm>
             <a:off x="3749040" y="1965960"/>
-            <a:ext cx="5028840" cy="1005480"/>
+            <a:ext cx="5028480" cy="1005120"/>
           </a:xfrm>
           <a:prstGeom prst="rect">
             <a:avLst/>
@@ -6205,7 +6282,7 @@
         <p:spPr>
           <a:xfrm>
             <a:off x="3749040" y="3200400"/>
-            <a:ext cx="5028840" cy="8640"/>
+            <a:ext cx="5028480" cy="8280"/>
           </a:xfrm>
           <a:prstGeom prst="rect">
             <a:avLst/>
@@ -6231,6 +6308,11 @@
             <a:noAutofit/>
           </a:bodyPr>
           <a:p>
+            <a:pPr>
+              <a:lnSpc>
+                <a:spcPct val="100000"/>
+              </a:lnSpc>
+            </a:pPr>
             <a:endParaRPr b="0" lang="en-US" sz="1800" spc="-1" strike="noStrike">
               <a:solidFill>
                 <a:srgbClr val="ffffff"/>
@@ -6249,7 +6331,7 @@
         <p:spPr>
           <a:xfrm>
             <a:off x="3749040" y="3337560"/>
-            <a:ext cx="1462680" cy="319680"/>
+            <a:ext cx="1462320" cy="319320"/>
           </a:xfrm>
           <a:prstGeom prst="rect">
             <a:avLst/>
@@ -6306,7 +6388,7 @@
         <p:spPr>
           <a:xfrm>
             <a:off x="5257800" y="3337560"/>
-            <a:ext cx="3520080" cy="319680"/>
+            <a:ext cx="3519720" cy="319320"/>
           </a:xfrm>
           <a:prstGeom prst="rect">
             <a:avLst/>
@@ -6363,7 +6445,7 @@
         <p:spPr>
           <a:xfrm>
             <a:off x="3749040" y="3684960"/>
-            <a:ext cx="1462680" cy="319680"/>
+            <a:ext cx="1462320" cy="319320"/>
           </a:xfrm>
           <a:prstGeom prst="rect">
             <a:avLst/>
@@ -6420,7 +6502,7 @@
         <p:spPr>
           <a:xfrm>
             <a:off x="5257800" y="3684960"/>
-            <a:ext cx="3520080" cy="319680"/>
+            <a:ext cx="3519720" cy="319320"/>
           </a:xfrm>
           <a:prstGeom prst="rect">
             <a:avLst/>
@@ -6457,7 +6539,7 @@
                 <a:latin typeface="Calibri"/>
                 <a:ea typeface="Calibri"/>
               </a:rPr>
-              <a:t>DEPI x NTI — Data Analysis Track</a:t>
+              <a:t>NTI — Data Analysis Track</a:t>
             </a:r>
             <a:endParaRPr b="0" lang="en-US" sz="1000" spc="-1" strike="noStrike">
               <a:solidFill>
@@ -6477,7 +6559,7 @@
         <p:spPr>
           <a:xfrm>
             <a:off x="3749040" y="4032360"/>
-            <a:ext cx="1462680" cy="319680"/>
+            <a:ext cx="1462320" cy="319320"/>
           </a:xfrm>
           <a:prstGeom prst="rect">
             <a:avLst/>
@@ -6534,7 +6616,7 @@
         <p:spPr>
           <a:xfrm>
             <a:off x="5257800" y="4032360"/>
-            <a:ext cx="3520080" cy="319680"/>
+            <a:ext cx="3519720" cy="319320"/>
           </a:xfrm>
           <a:prstGeom prst="rect">
             <a:avLst/>
@@ -6591,7 +6673,7 @@
         <p:spPr>
           <a:xfrm>
             <a:off x="3749040" y="4380120"/>
-            <a:ext cx="1462680" cy="319680"/>
+            <a:ext cx="1462320" cy="319320"/>
           </a:xfrm>
           <a:prstGeom prst="rect">
             <a:avLst/>
@@ -6648,7 +6730,7 @@
         <p:spPr>
           <a:xfrm>
             <a:off x="5257800" y="4380120"/>
-            <a:ext cx="3520080" cy="319680"/>
+            <a:ext cx="3519720" cy="319320"/>
           </a:xfrm>
           <a:prstGeom prst="rect">
             <a:avLst/>
@@ -6705,7 +6787,7 @@
         <p:spPr>
           <a:xfrm>
             <a:off x="3749040" y="4663440"/>
-            <a:ext cx="5028840" cy="319680"/>
+            <a:ext cx="5028480" cy="319320"/>
           </a:xfrm>
           <a:prstGeom prst="rect">
             <a:avLst/>
@@ -6799,7 +6881,7 @@
         <p:spPr>
           <a:xfrm>
             <a:off x="0" y="0"/>
-            <a:ext cx="9143640" cy="658080"/>
+            <a:ext cx="9143280" cy="657720"/>
           </a:xfrm>
           <a:prstGeom prst="rect">
             <a:avLst/>
@@ -6825,6 +6907,11 @@
             <a:noAutofit/>
           </a:bodyPr>
           <a:p>
+            <a:pPr>
+              <a:lnSpc>
+                <a:spcPct val="100000"/>
+              </a:lnSpc>
+            </a:pPr>
             <a:endParaRPr b="0" lang="en-US" sz="1800" spc="-1" strike="noStrike">
               <a:solidFill>
                 <a:srgbClr val="ffffff"/>
@@ -6843,7 +6930,7 @@
         <p:spPr>
           <a:xfrm>
             <a:off x="365760" y="0"/>
-            <a:ext cx="6857640" cy="658080"/>
+            <a:ext cx="6857280" cy="657720"/>
           </a:xfrm>
           <a:prstGeom prst="rect">
             <a:avLst/>
@@ -6900,7 +6987,7 @@
         <p:spPr>
           <a:xfrm>
             <a:off x="0" y="0"/>
-            <a:ext cx="8777880" cy="658080"/>
+            <a:ext cx="8777520" cy="657720"/>
           </a:xfrm>
           <a:prstGeom prst="rect">
             <a:avLst/>
@@ -6957,7 +7044,7 @@
         <p:spPr>
           <a:xfrm>
             <a:off x="0" y="4864680"/>
-            <a:ext cx="9143640" cy="273960"/>
+            <a:ext cx="9143280" cy="273600"/>
           </a:xfrm>
           <a:prstGeom prst="rect">
             <a:avLst/>
@@ -7014,7 +7101,7 @@
         <p:spPr>
           <a:xfrm>
             <a:off x="274320" y="822960"/>
-            <a:ext cx="4205880" cy="1261440"/>
+            <a:ext cx="4205520" cy="1261080"/>
           </a:xfrm>
           <a:prstGeom prst="rect">
             <a:avLst/>
@@ -7047,6 +7134,11 @@
             <a:noAutofit/>
           </a:bodyPr>
           <a:p>
+            <a:pPr>
+              <a:lnSpc>
+                <a:spcPct val="100000"/>
+              </a:lnSpc>
+            </a:pPr>
             <a:endParaRPr b="0" lang="en-US" sz="1800" spc="-1" strike="noStrike">
               <a:solidFill>
                 <a:srgbClr val="000000"/>
@@ -7065,7 +7157,7 @@
         <p:spPr>
           <a:xfrm>
             <a:off x="274320" y="822960"/>
-            <a:ext cx="4205880" cy="63720"/>
+            <a:ext cx="4205520" cy="63360"/>
           </a:xfrm>
           <a:prstGeom prst="rect">
             <a:avLst/>
@@ -7091,6 +7183,11 @@
             <a:noAutofit/>
           </a:bodyPr>
           <a:p>
+            <a:pPr>
+              <a:lnSpc>
+                <a:spcPct val="100000"/>
+              </a:lnSpc>
+            </a:pPr>
             <a:endParaRPr b="0" lang="en-US" sz="1800" spc="-1" strike="noStrike">
               <a:solidFill>
                 <a:srgbClr val="ffffff"/>
@@ -7109,7 +7206,7 @@
         <p:spPr>
           <a:xfrm>
             <a:off x="384120" y="914400"/>
-            <a:ext cx="456840" cy="411120"/>
+            <a:ext cx="456480" cy="410760"/>
           </a:xfrm>
           <a:prstGeom prst="rect">
             <a:avLst/>
@@ -7166,7 +7263,7 @@
         <p:spPr>
           <a:xfrm>
             <a:off x="896040" y="914400"/>
-            <a:ext cx="3474360" cy="383760"/>
+            <a:ext cx="3474000" cy="383400"/>
           </a:xfrm>
           <a:prstGeom prst="rect">
             <a:avLst/>
@@ -7223,7 +7320,7 @@
         <p:spPr>
           <a:xfrm>
             <a:off x="384120" y="1334880"/>
-            <a:ext cx="3977280" cy="685440"/>
+            <a:ext cx="3976920" cy="685080"/>
           </a:xfrm>
           <a:prstGeom prst="rect">
             <a:avLst/>
@@ -7280,7 +7377,7 @@
         <p:spPr>
           <a:xfrm>
             <a:off x="274320" y="2212920"/>
-            <a:ext cx="4205880" cy="1261440"/>
+            <a:ext cx="4205520" cy="1261080"/>
           </a:xfrm>
           <a:prstGeom prst="rect">
             <a:avLst/>
@@ -7313,6 +7410,11 @@
             <a:noAutofit/>
           </a:bodyPr>
           <a:p>
+            <a:pPr>
+              <a:lnSpc>
+                <a:spcPct val="100000"/>
+              </a:lnSpc>
+            </a:pPr>
             <a:endParaRPr b="0" lang="en-US" sz="1800" spc="-1" strike="noStrike">
               <a:solidFill>
                 <a:srgbClr val="000000"/>
@@ -7331,7 +7433,7 @@
         <p:spPr>
           <a:xfrm>
             <a:off x="274320" y="2212920"/>
-            <a:ext cx="4205880" cy="63720"/>
+            <a:ext cx="4205520" cy="63360"/>
           </a:xfrm>
           <a:prstGeom prst="rect">
             <a:avLst/>
@@ -7357,6 +7459,11 @@
             <a:noAutofit/>
           </a:bodyPr>
           <a:p>
+            <a:pPr>
+              <a:lnSpc>
+                <a:spcPct val="100000"/>
+              </a:lnSpc>
+            </a:pPr>
             <a:endParaRPr b="0" lang="en-US" sz="1800" spc="-1" strike="noStrike">
               <a:solidFill>
                 <a:srgbClr val="ffffff"/>
@@ -7375,7 +7482,7 @@
         <p:spPr>
           <a:xfrm>
             <a:off x="384120" y="2304360"/>
-            <a:ext cx="456840" cy="411120"/>
+            <a:ext cx="456480" cy="410760"/>
           </a:xfrm>
           <a:prstGeom prst="rect">
             <a:avLst/>
@@ -7432,7 +7539,7 @@
         <p:spPr>
           <a:xfrm>
             <a:off x="896040" y="2304360"/>
-            <a:ext cx="3474360" cy="383760"/>
+            <a:ext cx="3474000" cy="383400"/>
           </a:xfrm>
           <a:prstGeom prst="rect">
             <a:avLst/>
@@ -7489,7 +7596,7 @@
         <p:spPr>
           <a:xfrm>
             <a:off x="384120" y="2724840"/>
-            <a:ext cx="3977280" cy="685440"/>
+            <a:ext cx="3976920" cy="685080"/>
           </a:xfrm>
           <a:prstGeom prst="rect">
             <a:avLst/>
@@ -7546,7 +7653,7 @@
         <p:spPr>
           <a:xfrm>
             <a:off x="274320" y="3602880"/>
-            <a:ext cx="4205880" cy="1261440"/>
+            <a:ext cx="4205520" cy="1261080"/>
           </a:xfrm>
           <a:prstGeom prst="rect">
             <a:avLst/>
@@ -7579,6 +7686,11 @@
             <a:noAutofit/>
           </a:bodyPr>
           <a:p>
+            <a:pPr>
+              <a:lnSpc>
+                <a:spcPct val="100000"/>
+              </a:lnSpc>
+            </a:pPr>
             <a:endParaRPr b="0" lang="en-US" sz="1800" spc="-1" strike="noStrike">
               <a:solidFill>
                 <a:srgbClr val="000000"/>
@@ -7597,7 +7709,7 @@
         <p:spPr>
           <a:xfrm>
             <a:off x="274320" y="3602880"/>
-            <a:ext cx="4205880" cy="63720"/>
+            <a:ext cx="4205520" cy="63360"/>
           </a:xfrm>
           <a:prstGeom prst="rect">
             <a:avLst/>
@@ -7623,6 +7735,11 @@
             <a:noAutofit/>
           </a:bodyPr>
           <a:p>
+            <a:pPr>
+              <a:lnSpc>
+                <a:spcPct val="100000"/>
+              </a:lnSpc>
+            </a:pPr>
             <a:endParaRPr b="0" lang="en-US" sz="1800" spc="-1" strike="noStrike">
               <a:solidFill>
                 <a:srgbClr val="ffffff"/>
@@ -7641,7 +7758,7 @@
         <p:spPr>
           <a:xfrm>
             <a:off x="384120" y="3694320"/>
-            <a:ext cx="456840" cy="411120"/>
+            <a:ext cx="456480" cy="410760"/>
           </a:xfrm>
           <a:prstGeom prst="rect">
             <a:avLst/>
@@ -7698,7 +7815,7 @@
         <p:spPr>
           <a:xfrm>
             <a:off x="896040" y="3694320"/>
-            <a:ext cx="3474360" cy="383760"/>
+            <a:ext cx="3474000" cy="383400"/>
           </a:xfrm>
           <a:prstGeom prst="rect">
             <a:avLst/>
@@ -7755,7 +7872,7 @@
         <p:spPr>
           <a:xfrm>
             <a:off x="384120" y="4114800"/>
-            <a:ext cx="3977280" cy="685440"/>
+            <a:ext cx="3976920" cy="685080"/>
           </a:xfrm>
           <a:prstGeom prst="rect">
             <a:avLst/>
@@ -7812,7 +7929,7 @@
         <p:spPr>
           <a:xfrm>
             <a:off x="4709160" y="822960"/>
-            <a:ext cx="4205880" cy="1261440"/>
+            <a:ext cx="4205520" cy="1261080"/>
           </a:xfrm>
           <a:prstGeom prst="rect">
             <a:avLst/>
@@ -7845,6 +7962,11 @@
             <a:noAutofit/>
           </a:bodyPr>
           <a:p>
+            <a:pPr>
+              <a:lnSpc>
+                <a:spcPct val="100000"/>
+              </a:lnSpc>
+            </a:pPr>
             <a:endParaRPr b="0" lang="en-US" sz="1800" spc="-1" strike="noStrike">
               <a:solidFill>
                 <a:srgbClr val="000000"/>
@@ -7863,7 +7985,7 @@
         <p:spPr>
           <a:xfrm>
             <a:off x="4709160" y="822960"/>
-            <a:ext cx="4205880" cy="63720"/>
+            <a:ext cx="4205520" cy="63360"/>
           </a:xfrm>
           <a:prstGeom prst="rect">
             <a:avLst/>
@@ -7889,6 +8011,11 @@
             <a:noAutofit/>
           </a:bodyPr>
           <a:p>
+            <a:pPr>
+              <a:lnSpc>
+                <a:spcPct val="100000"/>
+              </a:lnSpc>
+            </a:pPr>
             <a:endParaRPr b="0" lang="en-US" sz="1800" spc="-1" strike="noStrike">
               <a:solidFill>
                 <a:srgbClr val="ffffff"/>
@@ -7907,7 +8034,7 @@
         <p:spPr>
           <a:xfrm>
             <a:off x="4818960" y="914400"/>
-            <a:ext cx="456840" cy="411120"/>
+            <a:ext cx="456480" cy="410760"/>
           </a:xfrm>
           <a:prstGeom prst="rect">
             <a:avLst/>
@@ -7964,7 +8091,7 @@
         <p:spPr>
           <a:xfrm>
             <a:off x="5330880" y="914400"/>
-            <a:ext cx="3474360" cy="383760"/>
+            <a:ext cx="3474000" cy="383400"/>
           </a:xfrm>
           <a:prstGeom prst="rect">
             <a:avLst/>
@@ -8021,7 +8148,7 @@
         <p:spPr>
           <a:xfrm>
             <a:off x="4818960" y="1334880"/>
-            <a:ext cx="3977280" cy="685440"/>
+            <a:ext cx="3976920" cy="685080"/>
           </a:xfrm>
           <a:prstGeom prst="rect">
             <a:avLst/>
@@ -8078,7 +8205,7 @@
         <p:spPr>
           <a:xfrm>
             <a:off x="4709160" y="2212920"/>
-            <a:ext cx="4205880" cy="1261440"/>
+            <a:ext cx="4205520" cy="1261080"/>
           </a:xfrm>
           <a:prstGeom prst="rect">
             <a:avLst/>
@@ -8111,6 +8238,11 @@
             <a:noAutofit/>
           </a:bodyPr>
           <a:p>
+            <a:pPr>
+              <a:lnSpc>
+                <a:spcPct val="100000"/>
+              </a:lnSpc>
+            </a:pPr>
             <a:endParaRPr b="0" lang="en-US" sz="1800" spc="-1" strike="noStrike">
               <a:solidFill>
                 <a:srgbClr val="000000"/>
@@ -8129,7 +8261,7 @@
         <p:spPr>
           <a:xfrm>
             <a:off x="4709160" y="2212920"/>
-            <a:ext cx="4205880" cy="63720"/>
+            <a:ext cx="4205520" cy="63360"/>
           </a:xfrm>
           <a:prstGeom prst="rect">
             <a:avLst/>
@@ -8155,6 +8287,11 @@
             <a:noAutofit/>
           </a:bodyPr>
           <a:p>
+            <a:pPr>
+              <a:lnSpc>
+                <a:spcPct val="100000"/>
+              </a:lnSpc>
+            </a:pPr>
             <a:endParaRPr b="0" lang="en-US" sz="1800" spc="-1" strike="noStrike">
               <a:solidFill>
                 <a:srgbClr val="ffffff"/>
@@ -8173,7 +8310,7 @@
         <p:spPr>
           <a:xfrm>
             <a:off x="4818960" y="2304360"/>
-            <a:ext cx="456840" cy="411120"/>
+            <a:ext cx="456480" cy="410760"/>
           </a:xfrm>
           <a:prstGeom prst="rect">
             <a:avLst/>
@@ -8230,7 +8367,7 @@
         <p:spPr>
           <a:xfrm>
             <a:off x="5330880" y="2304360"/>
-            <a:ext cx="3474360" cy="383760"/>
+            <a:ext cx="3474000" cy="383400"/>
           </a:xfrm>
           <a:prstGeom prst="rect">
             <a:avLst/>
@@ -8287,7 +8424,7 @@
         <p:spPr>
           <a:xfrm>
             <a:off x="4818960" y="2724840"/>
-            <a:ext cx="3977280" cy="685440"/>
+            <a:ext cx="3976920" cy="685080"/>
           </a:xfrm>
           <a:prstGeom prst="rect">
             <a:avLst/>
@@ -8344,7 +8481,7 @@
         <p:spPr>
           <a:xfrm>
             <a:off x="4709160" y="3602880"/>
-            <a:ext cx="4205880" cy="1261440"/>
+            <a:ext cx="4205520" cy="1261080"/>
           </a:xfrm>
           <a:prstGeom prst="rect">
             <a:avLst/>
@@ -8377,6 +8514,11 @@
             <a:noAutofit/>
           </a:bodyPr>
           <a:p>
+            <a:pPr>
+              <a:lnSpc>
+                <a:spcPct val="100000"/>
+              </a:lnSpc>
+            </a:pPr>
             <a:endParaRPr b="0" lang="en-US" sz="1800" spc="-1" strike="noStrike">
               <a:solidFill>
                 <a:srgbClr val="000000"/>
@@ -8395,7 +8537,7 @@
         <p:spPr>
           <a:xfrm>
             <a:off x="4709160" y="3602880"/>
-            <a:ext cx="4205880" cy="63720"/>
+            <a:ext cx="4205520" cy="63360"/>
           </a:xfrm>
           <a:prstGeom prst="rect">
             <a:avLst/>
@@ -8421,6 +8563,11 @@
             <a:noAutofit/>
           </a:bodyPr>
           <a:p>
+            <a:pPr>
+              <a:lnSpc>
+                <a:spcPct val="100000"/>
+              </a:lnSpc>
+            </a:pPr>
             <a:endParaRPr b="0" lang="en-US" sz="1800" spc="-1" strike="noStrike">
               <a:solidFill>
                 <a:srgbClr val="000000"/>
@@ -8439,7 +8586,7 @@
         <p:spPr>
           <a:xfrm>
             <a:off x="4818960" y="3694320"/>
-            <a:ext cx="456840" cy="411120"/>
+            <a:ext cx="456480" cy="410760"/>
           </a:xfrm>
           <a:prstGeom prst="rect">
             <a:avLst/>
@@ -8496,7 +8643,7 @@
         <p:spPr>
           <a:xfrm>
             <a:off x="5330880" y="3694320"/>
-            <a:ext cx="3474360" cy="383760"/>
+            <a:ext cx="3474000" cy="383400"/>
           </a:xfrm>
           <a:prstGeom prst="rect">
             <a:avLst/>
@@ -8553,7 +8700,7 @@
         <p:spPr>
           <a:xfrm>
             <a:off x="4818960" y="4114800"/>
-            <a:ext cx="3977280" cy="685440"/>
+            <a:ext cx="3976920" cy="685080"/>
           </a:xfrm>
           <a:prstGeom prst="rect">
             <a:avLst/>
@@ -8647,7 +8794,7 @@
         <p:spPr>
           <a:xfrm>
             <a:off x="0" y="0"/>
-            <a:ext cx="9143640" cy="5143320"/>
+            <a:ext cx="9143280" cy="5142960"/>
           </a:xfrm>
           <a:prstGeom prst="rect">
             <a:avLst/>
@@ -8673,6 +8820,11 @@
             <a:noAutofit/>
           </a:bodyPr>
           <a:p>
+            <a:pPr>
+              <a:lnSpc>
+                <a:spcPct val="100000"/>
+              </a:lnSpc>
+            </a:pPr>
             <a:endParaRPr b="0" lang="en-US" sz="1800" spc="-1" strike="noStrike">
               <a:solidFill>
                 <a:srgbClr val="ffffff"/>
@@ -8691,7 +8843,7 @@
         <p:spPr>
           <a:xfrm>
             <a:off x="0" y="0"/>
-            <a:ext cx="9143640" cy="54360"/>
+            <a:ext cx="9143280" cy="54000"/>
           </a:xfrm>
           <a:prstGeom prst="rect">
             <a:avLst/>
@@ -8717,6 +8869,11 @@
             <a:noAutofit/>
           </a:bodyPr>
           <a:p>
+            <a:pPr>
+              <a:lnSpc>
+                <a:spcPct val="100000"/>
+              </a:lnSpc>
+            </a:pPr>
             <a:endParaRPr b="0" lang="en-US" sz="1800" spc="-1" strike="noStrike">
               <a:solidFill>
                 <a:srgbClr val="ffffff"/>
@@ -8735,7 +8892,7 @@
         <p:spPr>
           <a:xfrm>
             <a:off x="0" y="5088600"/>
-            <a:ext cx="9143640" cy="54360"/>
+            <a:ext cx="9143280" cy="54000"/>
           </a:xfrm>
           <a:prstGeom prst="rect">
             <a:avLst/>
@@ -8761,6 +8918,11 @@
             <a:noAutofit/>
           </a:bodyPr>
           <a:p>
+            <a:pPr>
+              <a:lnSpc>
+                <a:spcPct val="100000"/>
+              </a:lnSpc>
+            </a:pPr>
             <a:endParaRPr b="0" lang="en-US" sz="1800" spc="-1" strike="noStrike">
               <a:solidFill>
                 <a:srgbClr val="ffffff"/>
@@ -8779,7 +8941,7 @@
         <p:spPr>
           <a:xfrm>
             <a:off x="457200" y="548640"/>
-            <a:ext cx="8229240" cy="1005480"/>
+            <a:ext cx="8228880" cy="1005120"/>
           </a:xfrm>
           <a:prstGeom prst="rect">
             <a:avLst/>
@@ -8836,7 +8998,7 @@
         <p:spPr>
           <a:xfrm>
             <a:off x="457200" y="1600200"/>
-            <a:ext cx="8229240" cy="456840"/>
+            <a:ext cx="8228880" cy="456480"/>
           </a:xfrm>
           <a:prstGeom prst="rect">
             <a:avLst/>
@@ -8934,7 +9096,7 @@
         <p:spPr>
           <a:xfrm>
             <a:off x="457200" y="2377440"/>
-            <a:ext cx="2011320" cy="273960"/>
+            <a:ext cx="2010960" cy="273600"/>
           </a:xfrm>
           <a:prstGeom prst="rect">
             <a:avLst/>
@@ -8991,7 +9153,7 @@
         <p:spPr>
           <a:xfrm>
             <a:off x="457200" y="2651760"/>
-            <a:ext cx="2011320" cy="255600"/>
+            <a:ext cx="2010960" cy="255240"/>
           </a:xfrm>
           <a:prstGeom prst="rect">
             <a:avLst/>
@@ -9028,7 +9190,7 @@
                 <a:latin typeface="Calibri"/>
                 <a:ea typeface="Calibri"/>
               </a:rPr>
-              <a:t>nourhatem.netlify.app</a:t>
+              <a:t>nourhatem.web.app</a:t>
             </a:r>
             <a:endParaRPr b="0" lang="en-US" sz="900" spc="-1" strike="noStrike">
               <a:solidFill>
@@ -9048,7 +9210,7 @@
         <p:spPr>
           <a:xfrm>
             <a:off x="2651760" y="2377440"/>
-            <a:ext cx="2011320" cy="273960"/>
+            <a:ext cx="2010960" cy="273600"/>
           </a:xfrm>
           <a:prstGeom prst="rect">
             <a:avLst/>
@@ -9105,7 +9267,7 @@
         <p:spPr>
           <a:xfrm>
             <a:off x="2651760" y="2651760"/>
-            <a:ext cx="2011320" cy="255600"/>
+            <a:ext cx="2010960" cy="255240"/>
           </a:xfrm>
           <a:prstGeom prst="rect">
             <a:avLst/>
@@ -9162,7 +9324,7 @@
         <p:spPr>
           <a:xfrm>
             <a:off x="4846320" y="2377440"/>
-            <a:ext cx="2011320" cy="273960"/>
+            <a:ext cx="2010960" cy="273600"/>
           </a:xfrm>
           <a:prstGeom prst="rect">
             <a:avLst/>
@@ -9219,7 +9381,7 @@
         <p:spPr>
           <a:xfrm>
             <a:off x="4846320" y="2651760"/>
-            <a:ext cx="2011320" cy="255600"/>
+            <a:ext cx="2010960" cy="255240"/>
           </a:xfrm>
           <a:prstGeom prst="rect">
             <a:avLst/>
@@ -9276,7 +9438,7 @@
         <p:spPr>
           <a:xfrm>
             <a:off x="7040880" y="2377440"/>
-            <a:ext cx="2011320" cy="273960"/>
+            <a:ext cx="2010960" cy="273600"/>
           </a:xfrm>
           <a:prstGeom prst="rect">
             <a:avLst/>
@@ -9333,7 +9495,7 @@
         <p:spPr>
           <a:xfrm>
             <a:off x="7040880" y="2651760"/>
-            <a:ext cx="2011320" cy="255600"/>
+            <a:ext cx="2010960" cy="255240"/>
           </a:xfrm>
           <a:prstGeom prst="rect">
             <a:avLst/>
@@ -9390,7 +9552,7 @@
         <p:spPr>
           <a:xfrm>
             <a:off x="731520" y="3246120"/>
-            <a:ext cx="1645560" cy="1188360"/>
+            <a:ext cx="1645200" cy="1188000"/>
           </a:xfrm>
           <a:prstGeom prst="rect">
             <a:avLst/>
@@ -9416,6 +9578,11 @@
             <a:noAutofit/>
           </a:bodyPr>
           <a:p>
+            <a:pPr>
+              <a:lnSpc>
+                <a:spcPct val="100000"/>
+              </a:lnSpc>
+            </a:pPr>
             <a:endParaRPr b="0" lang="en-US" sz="1800" spc="-1" strike="noStrike">
               <a:solidFill>
                 <a:srgbClr val="ffffff"/>
@@ -9434,7 +9601,7 @@
         <p:spPr>
           <a:xfrm>
             <a:off x="731520" y="3310200"/>
-            <a:ext cx="1645560" cy="594000"/>
+            <a:ext cx="1645200" cy="593640"/>
           </a:xfrm>
           <a:prstGeom prst="rect">
             <a:avLst/>
@@ -9491,7 +9658,7 @@
         <p:spPr>
           <a:xfrm>
             <a:off x="731520" y="3931920"/>
-            <a:ext cx="1645560" cy="383760"/>
+            <a:ext cx="1645200" cy="383400"/>
           </a:xfrm>
           <a:prstGeom prst="rect">
             <a:avLst/>
@@ -9548,7 +9715,7 @@
         <p:spPr>
           <a:xfrm>
             <a:off x="2743200" y="3246120"/>
-            <a:ext cx="1645560" cy="1188360"/>
+            <a:ext cx="1645200" cy="1188000"/>
           </a:xfrm>
           <a:prstGeom prst="rect">
             <a:avLst/>
@@ -9574,6 +9741,11 @@
             <a:noAutofit/>
           </a:bodyPr>
           <a:p>
+            <a:pPr>
+              <a:lnSpc>
+                <a:spcPct val="100000"/>
+              </a:lnSpc>
+            </a:pPr>
             <a:endParaRPr b="0" lang="en-US" sz="1800" spc="-1" strike="noStrike">
               <a:solidFill>
                 <a:srgbClr val="ffffff"/>
@@ -9592,7 +9764,7 @@
         <p:spPr>
           <a:xfrm>
             <a:off x="2743200" y="3310200"/>
-            <a:ext cx="1645560" cy="594000"/>
+            <a:ext cx="1645200" cy="593640"/>
           </a:xfrm>
           <a:prstGeom prst="rect">
             <a:avLst/>
@@ -9649,7 +9821,7 @@
         <p:spPr>
           <a:xfrm>
             <a:off x="2743200" y="3931920"/>
-            <a:ext cx="1645560" cy="383760"/>
+            <a:ext cx="1645200" cy="383400"/>
           </a:xfrm>
           <a:prstGeom prst="rect">
             <a:avLst/>
@@ -9706,7 +9878,7 @@
         <p:spPr>
           <a:xfrm>
             <a:off x="4754880" y="3246120"/>
-            <a:ext cx="1645560" cy="1188360"/>
+            <a:ext cx="1645200" cy="1188000"/>
           </a:xfrm>
           <a:prstGeom prst="rect">
             <a:avLst/>
@@ -9732,6 +9904,11 @@
             <a:noAutofit/>
           </a:bodyPr>
           <a:p>
+            <a:pPr>
+              <a:lnSpc>
+                <a:spcPct val="100000"/>
+              </a:lnSpc>
+            </a:pPr>
             <a:endParaRPr b="0" lang="en-US" sz="1800" spc="-1" strike="noStrike">
               <a:solidFill>
                 <a:srgbClr val="ffffff"/>
@@ -9750,7 +9927,7 @@
         <p:spPr>
           <a:xfrm>
             <a:off x="4754880" y="3310200"/>
-            <a:ext cx="1645560" cy="594000"/>
+            <a:ext cx="1645200" cy="593640"/>
           </a:xfrm>
           <a:prstGeom prst="rect">
             <a:avLst/>
@@ -9807,7 +9984,7 @@
         <p:spPr>
           <a:xfrm>
             <a:off x="4754880" y="3931920"/>
-            <a:ext cx="1645560" cy="383760"/>
+            <a:ext cx="1645200" cy="383400"/>
           </a:xfrm>
           <a:prstGeom prst="rect">
             <a:avLst/>
@@ -9864,7 +10041,7 @@
         <p:spPr>
           <a:xfrm>
             <a:off x="6766560" y="3246120"/>
-            <a:ext cx="1645560" cy="1188360"/>
+            <a:ext cx="1645200" cy="1188000"/>
           </a:xfrm>
           <a:prstGeom prst="rect">
             <a:avLst/>
@@ -9890,6 +10067,11 @@
             <a:noAutofit/>
           </a:bodyPr>
           <a:p>
+            <a:pPr>
+              <a:lnSpc>
+                <a:spcPct val="100000"/>
+              </a:lnSpc>
+            </a:pPr>
             <a:endParaRPr b="0" lang="en-US" sz="1800" spc="-1" strike="noStrike">
               <a:solidFill>
                 <a:srgbClr val="ffffff"/>
@@ -9908,7 +10090,7 @@
         <p:spPr>
           <a:xfrm>
             <a:off x="6766560" y="3310200"/>
-            <a:ext cx="1645560" cy="594000"/>
+            <a:ext cx="1645200" cy="593640"/>
           </a:xfrm>
           <a:prstGeom prst="rect">
             <a:avLst/>
@@ -9965,7 +10147,7 @@
         <p:spPr>
           <a:xfrm>
             <a:off x="6766560" y="3931920"/>
-            <a:ext cx="1645560" cy="383760"/>
+            <a:ext cx="1645200" cy="383400"/>
           </a:xfrm>
           <a:prstGeom prst="rect">
             <a:avLst/>
@@ -10022,7 +10204,7 @@
         <p:spPr>
           <a:xfrm>
             <a:off x="457200" y="4736520"/>
-            <a:ext cx="8229240" cy="273960"/>
+            <a:ext cx="8228880" cy="273600"/>
           </a:xfrm>
           <a:prstGeom prst="rect">
             <a:avLst/>
@@ -10059,7 +10241,7 @@
                 <a:latin typeface="Calibri"/>
                 <a:ea typeface="Calibri"/>
               </a:rPr>
-              <a:t>DEPI x NTI — Data Analysis Track  |  ENG. DONIA — Evaluation Committee</a:t>
+              <a:t>NTI — Data Analysis Track</a:t>
             </a:r>
             <a:endParaRPr b="0" lang="en-US" sz="900" spc="-1" strike="noStrike">
               <a:solidFill>
@@ -10116,7 +10298,7 @@
         <p:spPr>
           <a:xfrm>
             <a:off x="0" y="0"/>
-            <a:ext cx="9143640" cy="658080"/>
+            <a:ext cx="9143280" cy="657720"/>
           </a:xfrm>
           <a:prstGeom prst="rect">
             <a:avLst/>
@@ -10142,6 +10324,11 @@
             <a:noAutofit/>
           </a:bodyPr>
           <a:p>
+            <a:pPr>
+              <a:lnSpc>
+                <a:spcPct val="100000"/>
+              </a:lnSpc>
+            </a:pPr>
             <a:endParaRPr b="0" lang="en-US" sz="1800" spc="-1" strike="noStrike">
               <a:solidFill>
                 <a:srgbClr val="ffffff"/>
@@ -10160,7 +10347,7 @@
         <p:spPr>
           <a:xfrm>
             <a:off x="365760" y="0"/>
-            <a:ext cx="6857640" cy="658080"/>
+            <a:ext cx="6857280" cy="657720"/>
           </a:xfrm>
           <a:prstGeom prst="rect">
             <a:avLst/>
@@ -10217,7 +10404,7 @@
         <p:spPr>
           <a:xfrm>
             <a:off x="0" y="0"/>
-            <a:ext cx="8777880" cy="658080"/>
+            <a:ext cx="8777520" cy="657720"/>
           </a:xfrm>
           <a:prstGeom prst="rect">
             <a:avLst/>
@@ -10274,7 +10461,7 @@
         <p:spPr>
           <a:xfrm>
             <a:off x="0" y="4864680"/>
-            <a:ext cx="9143640" cy="273960"/>
+            <a:ext cx="9143280" cy="273600"/>
           </a:xfrm>
           <a:prstGeom prst="rect">
             <a:avLst/>
@@ -10303,17 +10490,7 @@
                 <a:tab algn="l" pos="0"/>
               </a:tabLst>
             </a:pPr>
-            <a:r>
-              <a:rPr b="0" lang="en-US" sz="900" spc="-1" strike="noStrike">
-                <a:solidFill>
-                  <a:srgbClr val="8090a8"/>
-                </a:solidFill>
-                <a:latin typeface="Calibri"/>
-                <a:ea typeface="Calibri"/>
-              </a:rPr>
-              <a:t>NTI Academic Success &amp; Intervention</a:t>
-            </a:r>
-            <a:endParaRPr b="0" lang="en-US" sz="900" spc="-1" strike="noStrike">
+            <a:endParaRPr b="0" lang="en-US" sz="1800" spc="-1" strike="noStrike">
               <a:solidFill>
                 <a:srgbClr val="000000"/>
               </a:solidFill>
@@ -10331,7 +10508,7 @@
         <p:spPr>
           <a:xfrm>
             <a:off x="365760" y="822960"/>
-            <a:ext cx="1919880" cy="3474360"/>
+            <a:ext cx="1919520" cy="3474000"/>
           </a:xfrm>
           <a:prstGeom prst="rect">
             <a:avLst/>
@@ -10364,6 +10541,11 @@
             <a:noAutofit/>
           </a:bodyPr>
           <a:p>
+            <a:pPr>
+              <a:lnSpc>
+                <a:spcPct val="100000"/>
+              </a:lnSpc>
+            </a:pPr>
             <a:endParaRPr b="0" lang="en-US" sz="1800" spc="-1" strike="noStrike">
               <a:solidFill>
                 <a:srgbClr val="000000"/>
@@ -10382,7 +10564,7 @@
         <p:spPr>
           <a:xfrm>
             <a:off x="365760" y="822960"/>
-            <a:ext cx="1919880" cy="72720"/>
+            <a:ext cx="1919520" cy="72360"/>
           </a:xfrm>
           <a:prstGeom prst="rect">
             <a:avLst/>
@@ -10408,6 +10590,11 @@
             <a:noAutofit/>
           </a:bodyPr>
           <a:p>
+            <a:pPr>
+              <a:lnSpc>
+                <a:spcPct val="100000"/>
+              </a:lnSpc>
+            </a:pPr>
             <a:endParaRPr b="0" lang="en-US" sz="1800" spc="-1" strike="noStrike">
               <a:solidFill>
                 <a:srgbClr val="ffffff"/>
@@ -10426,7 +10613,7 @@
         <p:spPr>
           <a:xfrm>
             <a:off x="365760" y="868680"/>
-            <a:ext cx="1919880" cy="639720"/>
+            <a:ext cx="1919520" cy="639360"/>
           </a:xfrm>
           <a:prstGeom prst="rect">
             <a:avLst/>
@@ -10483,7 +10670,7 @@
         <p:spPr>
           <a:xfrm>
             <a:off x="457200" y="1554480"/>
-            <a:ext cx="1737000" cy="411120"/>
+            <a:ext cx="1736640" cy="410760"/>
           </a:xfrm>
           <a:prstGeom prst="rect">
             <a:avLst/>
@@ -10540,7 +10727,7 @@
         <p:spPr>
           <a:xfrm>
             <a:off x="457200" y="1993320"/>
-            <a:ext cx="1737000" cy="319680"/>
+            <a:ext cx="1736640" cy="319320"/>
           </a:xfrm>
           <a:prstGeom prst="rect">
             <a:avLst/>
@@ -10597,7 +10784,7 @@
         <p:spPr>
           <a:xfrm>
             <a:off x="475560" y="2423160"/>
-            <a:ext cx="1700280" cy="1462680"/>
+            <a:ext cx="1699920" cy="1462320"/>
           </a:xfrm>
           <a:prstGeom prst="rect">
             <a:avLst/>
@@ -10654,7 +10841,7 @@
         <p:spPr>
           <a:xfrm>
             <a:off x="2286000" y="2011680"/>
-            <a:ext cx="200880" cy="365400"/>
+            <a:ext cx="200520" cy="365040"/>
           </a:xfrm>
           <a:prstGeom prst="rect">
             <a:avLst/>
@@ -10711,7 +10898,7 @@
         <p:spPr>
           <a:xfrm>
             <a:off x="2487240" y="822960"/>
-            <a:ext cx="1919880" cy="3474360"/>
+            <a:ext cx="1919520" cy="3474000"/>
           </a:xfrm>
           <a:prstGeom prst="rect">
             <a:avLst/>
@@ -10744,6 +10931,11 @@
             <a:noAutofit/>
           </a:bodyPr>
           <a:p>
+            <a:pPr>
+              <a:lnSpc>
+                <a:spcPct val="100000"/>
+              </a:lnSpc>
+            </a:pPr>
             <a:endParaRPr b="0" lang="en-US" sz="1800" spc="-1" strike="noStrike">
               <a:solidFill>
                 <a:srgbClr val="000000"/>
@@ -10762,7 +10954,7 @@
         <p:spPr>
           <a:xfrm>
             <a:off x="2487240" y="822960"/>
-            <a:ext cx="1919880" cy="72720"/>
+            <a:ext cx="1919520" cy="72360"/>
           </a:xfrm>
           <a:prstGeom prst="rect">
             <a:avLst/>
@@ -10788,6 +10980,11 @@
             <a:noAutofit/>
           </a:bodyPr>
           <a:p>
+            <a:pPr>
+              <a:lnSpc>
+                <a:spcPct val="100000"/>
+              </a:lnSpc>
+            </a:pPr>
             <a:endParaRPr b="0" lang="en-US" sz="1800" spc="-1" strike="noStrike">
               <a:solidFill>
                 <a:srgbClr val="ffffff"/>
@@ -10806,7 +11003,7 @@
         <p:spPr>
           <a:xfrm>
             <a:off x="2487240" y="868680"/>
-            <a:ext cx="1919880" cy="639720"/>
+            <a:ext cx="1919520" cy="639360"/>
           </a:xfrm>
           <a:prstGeom prst="rect">
             <a:avLst/>
@@ -10863,7 +11060,7 @@
         <p:spPr>
           <a:xfrm>
             <a:off x="2578680" y="1554480"/>
-            <a:ext cx="1737000" cy="411120"/>
+            <a:ext cx="1736640" cy="410760"/>
           </a:xfrm>
           <a:prstGeom prst="rect">
             <a:avLst/>
@@ -10920,7 +11117,7 @@
         <p:spPr>
           <a:xfrm>
             <a:off x="2578680" y="1993320"/>
-            <a:ext cx="1737000" cy="319680"/>
+            <a:ext cx="1736640" cy="319320"/>
           </a:xfrm>
           <a:prstGeom prst="rect">
             <a:avLst/>
@@ -10977,7 +11174,7 @@
         <p:spPr>
           <a:xfrm>
             <a:off x="2597040" y="2423160"/>
-            <a:ext cx="1700280" cy="1462680"/>
+            <a:ext cx="1699920" cy="1462320"/>
           </a:xfrm>
           <a:prstGeom prst="rect">
             <a:avLst/>
@@ -11034,7 +11231,7 @@
         <p:spPr>
           <a:xfrm>
             <a:off x="4407480" y="2011680"/>
-            <a:ext cx="200880" cy="365400"/>
+            <a:ext cx="200520" cy="365040"/>
           </a:xfrm>
           <a:prstGeom prst="rect">
             <a:avLst/>
@@ -11091,7 +11288,7 @@
         <p:spPr>
           <a:xfrm>
             <a:off x="4608720" y="822960"/>
-            <a:ext cx="1919880" cy="3474360"/>
+            <a:ext cx="1919520" cy="3474000"/>
           </a:xfrm>
           <a:prstGeom prst="rect">
             <a:avLst/>
@@ -11124,6 +11321,11 @@
             <a:noAutofit/>
           </a:bodyPr>
           <a:p>
+            <a:pPr>
+              <a:lnSpc>
+                <a:spcPct val="100000"/>
+              </a:lnSpc>
+            </a:pPr>
             <a:endParaRPr b="0" lang="en-US" sz="1800" spc="-1" strike="noStrike">
               <a:solidFill>
                 <a:srgbClr val="000000"/>
@@ -11142,7 +11344,7 @@
         <p:spPr>
           <a:xfrm>
             <a:off x="4608720" y="822960"/>
-            <a:ext cx="1919880" cy="72720"/>
+            <a:ext cx="1919520" cy="72360"/>
           </a:xfrm>
           <a:prstGeom prst="rect">
             <a:avLst/>
@@ -11168,6 +11370,11 @@
             <a:noAutofit/>
           </a:bodyPr>
           <a:p>
+            <a:pPr>
+              <a:lnSpc>
+                <a:spcPct val="100000"/>
+              </a:lnSpc>
+            </a:pPr>
             <a:endParaRPr b="0" lang="en-US" sz="1800" spc="-1" strike="noStrike">
               <a:solidFill>
                 <a:srgbClr val="ffffff"/>
@@ -11186,7 +11393,7 @@
         <p:spPr>
           <a:xfrm>
             <a:off x="4608720" y="868680"/>
-            <a:ext cx="1919880" cy="639720"/>
+            <a:ext cx="1919520" cy="639360"/>
           </a:xfrm>
           <a:prstGeom prst="rect">
             <a:avLst/>
@@ -11243,7 +11450,7 @@
         <p:spPr>
           <a:xfrm>
             <a:off x="4700160" y="1554480"/>
-            <a:ext cx="1737000" cy="411120"/>
+            <a:ext cx="1736640" cy="410760"/>
           </a:xfrm>
           <a:prstGeom prst="rect">
             <a:avLst/>
@@ -11300,7 +11507,7 @@
         <p:spPr>
           <a:xfrm>
             <a:off x="4700160" y="1993320"/>
-            <a:ext cx="1737000" cy="319680"/>
+            <a:ext cx="1736640" cy="319320"/>
           </a:xfrm>
           <a:prstGeom prst="rect">
             <a:avLst/>
@@ -11357,7 +11564,7 @@
         <p:spPr>
           <a:xfrm>
             <a:off x="4718160" y="2423160"/>
-            <a:ext cx="1700280" cy="1462680"/>
+            <a:ext cx="1699920" cy="1462320"/>
           </a:xfrm>
           <a:prstGeom prst="rect">
             <a:avLst/>
@@ -11414,7 +11621,7 @@
         <p:spPr>
           <a:xfrm>
             <a:off x="6528960" y="2011680"/>
-            <a:ext cx="200880" cy="365400"/>
+            <a:ext cx="200520" cy="365040"/>
           </a:xfrm>
           <a:prstGeom prst="rect">
             <a:avLst/>
@@ -11471,7 +11678,7 @@
         <p:spPr>
           <a:xfrm>
             <a:off x="6729840" y="822960"/>
-            <a:ext cx="1919880" cy="3474360"/>
+            <a:ext cx="1919520" cy="3474000"/>
           </a:xfrm>
           <a:prstGeom prst="rect">
             <a:avLst/>
@@ -11504,6 +11711,11 @@
             <a:noAutofit/>
           </a:bodyPr>
           <a:p>
+            <a:pPr>
+              <a:lnSpc>
+                <a:spcPct val="100000"/>
+              </a:lnSpc>
+            </a:pPr>
             <a:endParaRPr b="0" lang="en-US" sz="1800" spc="-1" strike="noStrike">
               <a:solidFill>
                 <a:srgbClr val="000000"/>
@@ -11522,7 +11734,7 @@
         <p:spPr>
           <a:xfrm>
             <a:off x="6729840" y="822960"/>
-            <a:ext cx="1919880" cy="72720"/>
+            <a:ext cx="1919520" cy="72360"/>
           </a:xfrm>
           <a:prstGeom prst="rect">
             <a:avLst/>
@@ -11548,6 +11760,11 @@
             <a:noAutofit/>
           </a:bodyPr>
           <a:p>
+            <a:pPr>
+              <a:lnSpc>
+                <a:spcPct val="100000"/>
+              </a:lnSpc>
+            </a:pPr>
             <a:endParaRPr b="0" lang="en-US" sz="1800" spc="-1" strike="noStrike">
               <a:solidFill>
                 <a:srgbClr val="ffffff"/>
@@ -11566,7 +11783,7 @@
         <p:spPr>
           <a:xfrm>
             <a:off x="6729840" y="868680"/>
-            <a:ext cx="1919880" cy="639720"/>
+            <a:ext cx="1919520" cy="639360"/>
           </a:xfrm>
           <a:prstGeom prst="rect">
             <a:avLst/>
@@ -11623,7 +11840,7 @@
         <p:spPr>
           <a:xfrm>
             <a:off x="6821280" y="1554480"/>
-            <a:ext cx="1737000" cy="411120"/>
+            <a:ext cx="1736640" cy="410760"/>
           </a:xfrm>
           <a:prstGeom prst="rect">
             <a:avLst/>
@@ -11680,7 +11897,7 @@
         <p:spPr>
           <a:xfrm>
             <a:off x="6821280" y="1993320"/>
-            <a:ext cx="1737000" cy="319680"/>
+            <a:ext cx="1736640" cy="319320"/>
           </a:xfrm>
           <a:prstGeom prst="rect">
             <a:avLst/>
@@ -11737,7 +11954,7 @@
         <p:spPr>
           <a:xfrm>
             <a:off x="6839640" y="2423160"/>
-            <a:ext cx="1700280" cy="1462680"/>
+            <a:ext cx="1699920" cy="1462320"/>
           </a:xfrm>
           <a:prstGeom prst="rect">
             <a:avLst/>
@@ -11774,7 +11991,7 @@
                 <a:latin typeface="Calibri"/>
                 <a:ea typeface="Calibri"/>
               </a:rPr>
-              <a:t>6-page interactive dashboard · ENG. DONIA</a:t>
+              <a:t>6-page interactive dashboard</a:t>
             </a:r>
             <a:endParaRPr b="0" lang="en-US" sz="1000" spc="-1" strike="noStrike">
               <a:solidFill>
@@ -11794,7 +12011,7 @@
         <p:spPr>
           <a:xfrm>
             <a:off x="365760" y="4480560"/>
-            <a:ext cx="8412120" cy="228240"/>
+            <a:ext cx="8411760" cy="227880"/>
           </a:xfrm>
           <a:prstGeom prst="rect">
             <a:avLst/>
@@ -11851,7 +12068,7 @@
         <p:spPr>
           <a:xfrm>
             <a:off x="274320" y="4663440"/>
-            <a:ext cx="1554120" cy="228240"/>
+            <a:ext cx="1553760" cy="227880"/>
           </a:xfrm>
           <a:prstGeom prst="rect">
             <a:avLst/>
@@ -11908,7 +12125,7 @@
         <p:spPr>
           <a:xfrm>
             <a:off x="274320" y="4873680"/>
-            <a:ext cx="1554120" cy="182520"/>
+            <a:ext cx="1553760" cy="182160"/>
           </a:xfrm>
           <a:prstGeom prst="rect">
             <a:avLst/>
@@ -11965,7 +12182,7 @@
         <p:spPr>
           <a:xfrm>
             <a:off x="2011680" y="4663440"/>
-            <a:ext cx="1554120" cy="228240"/>
+            <a:ext cx="1553760" cy="227880"/>
           </a:xfrm>
           <a:prstGeom prst="rect">
             <a:avLst/>
@@ -12022,7 +12239,7 @@
         <p:spPr>
           <a:xfrm>
             <a:off x="2011680" y="4873680"/>
-            <a:ext cx="1554120" cy="182520"/>
+            <a:ext cx="1553760" cy="182160"/>
           </a:xfrm>
           <a:prstGeom prst="rect">
             <a:avLst/>
@@ -12078,8 +12295,8 @@
         </p:nvSpPr>
         <p:spPr>
           <a:xfrm>
-            <a:off x="3749040" y="4663440"/>
-            <a:ext cx="1554120" cy="228240"/>
+            <a:off x="3749040" y="4683960"/>
+            <a:ext cx="1553760" cy="227880"/>
           </a:xfrm>
           <a:prstGeom prst="rect">
             <a:avLst/>
@@ -12135,8 +12352,8 @@
         </p:nvSpPr>
         <p:spPr>
           <a:xfrm>
-            <a:off x="3749040" y="4873680"/>
-            <a:ext cx="1554120" cy="182520"/>
+            <a:off x="3749040" y="4864680"/>
+            <a:ext cx="1553760" cy="182160"/>
           </a:xfrm>
           <a:prstGeom prst="rect">
             <a:avLst/>
@@ -12193,7 +12410,7 @@
         <p:spPr>
           <a:xfrm>
             <a:off x="5486400" y="4663440"/>
-            <a:ext cx="1554120" cy="228240"/>
+            <a:ext cx="1553760" cy="227880"/>
           </a:xfrm>
           <a:prstGeom prst="rect">
             <a:avLst/>
@@ -12250,7 +12467,7 @@
         <p:spPr>
           <a:xfrm>
             <a:off x="5486400" y="4873680"/>
-            <a:ext cx="1554120" cy="182520"/>
+            <a:ext cx="1553760" cy="182160"/>
           </a:xfrm>
           <a:prstGeom prst="rect">
             <a:avLst/>
@@ -12307,7 +12524,7 @@
         <p:spPr>
           <a:xfrm>
             <a:off x="7223760" y="4663440"/>
-            <a:ext cx="1554120" cy="228240"/>
+            <a:ext cx="1553760" cy="227880"/>
           </a:xfrm>
           <a:prstGeom prst="rect">
             <a:avLst/>
@@ -12364,7 +12581,7 @@
         <p:spPr>
           <a:xfrm>
             <a:off x="7223760" y="4873680"/>
-            <a:ext cx="1554120" cy="182520"/>
+            <a:ext cx="1553760" cy="182160"/>
           </a:xfrm>
           <a:prstGeom prst="rect">
             <a:avLst/>
@@ -12458,7 +12675,7 @@
         <p:spPr>
           <a:xfrm>
             <a:off x="0" y="0"/>
-            <a:ext cx="9143640" cy="658080"/>
+            <a:ext cx="9143280" cy="657720"/>
           </a:xfrm>
           <a:prstGeom prst="rect">
             <a:avLst/>
@@ -12484,6 +12701,11 @@
             <a:noAutofit/>
           </a:bodyPr>
           <a:p>
+            <a:pPr>
+              <a:lnSpc>
+                <a:spcPct val="100000"/>
+              </a:lnSpc>
+            </a:pPr>
             <a:endParaRPr b="0" lang="en-US" sz="1800" spc="-1" strike="noStrike">
               <a:solidFill>
                 <a:srgbClr val="ffffff"/>
@@ -12502,7 +12724,7 @@
         <p:spPr>
           <a:xfrm>
             <a:off x="365760" y="0"/>
-            <a:ext cx="6857640" cy="658080"/>
+            <a:ext cx="6857280" cy="657720"/>
           </a:xfrm>
           <a:prstGeom prst="rect">
             <a:avLst/>
@@ -12559,7 +12781,7 @@
         <p:spPr>
           <a:xfrm>
             <a:off x="0" y="0"/>
-            <a:ext cx="8777880" cy="658080"/>
+            <a:ext cx="8777520" cy="657720"/>
           </a:xfrm>
           <a:prstGeom prst="rect">
             <a:avLst/>
@@ -12616,7 +12838,7 @@
         <p:spPr>
           <a:xfrm>
             <a:off x="0" y="4864680"/>
-            <a:ext cx="9143640" cy="273960"/>
+            <a:ext cx="9143280" cy="273600"/>
           </a:xfrm>
           <a:prstGeom prst="rect">
             <a:avLst/>
@@ -12673,7 +12895,7 @@
         <p:spPr>
           <a:xfrm>
             <a:off x="274320" y="777240"/>
-            <a:ext cx="1599840" cy="1234080"/>
+            <a:ext cx="1599480" cy="1233720"/>
           </a:xfrm>
           <a:prstGeom prst="rect">
             <a:avLst/>
@@ -12706,6 +12928,11 @@
             <a:noAutofit/>
           </a:bodyPr>
           <a:p>
+            <a:pPr>
+              <a:lnSpc>
+                <a:spcPct val="100000"/>
+              </a:lnSpc>
+            </a:pPr>
             <a:endParaRPr b="0" lang="en-US" sz="1800" spc="-1" strike="noStrike">
               <a:solidFill>
                 <a:srgbClr val="000000"/>
@@ -12724,7 +12951,7 @@
         <p:spPr>
           <a:xfrm>
             <a:off x="274320" y="777240"/>
-            <a:ext cx="1599840" cy="54360"/>
+            <a:ext cx="1599480" cy="54000"/>
           </a:xfrm>
           <a:prstGeom prst="rect">
             <a:avLst/>
@@ -12750,6 +12977,11 @@
             <a:noAutofit/>
           </a:bodyPr>
           <a:p>
+            <a:pPr>
+              <a:lnSpc>
+                <a:spcPct val="100000"/>
+              </a:lnSpc>
+            </a:pPr>
             <a:endParaRPr b="0" lang="en-US" sz="1800" spc="-1" strike="noStrike">
               <a:solidFill>
                 <a:srgbClr val="ffffff"/>
@@ -12768,7 +13000,7 @@
         <p:spPr>
           <a:xfrm>
             <a:off x="274320" y="887040"/>
-            <a:ext cx="1599840" cy="678600"/>
+            <a:ext cx="1599480" cy="678240"/>
           </a:xfrm>
           <a:prstGeom prst="rect">
             <a:avLst/>
@@ -12825,7 +13057,7 @@
         <p:spPr>
           <a:xfrm>
             <a:off x="365760" y="1542600"/>
-            <a:ext cx="1416960" cy="431640"/>
+            <a:ext cx="1416600" cy="431280"/>
           </a:xfrm>
           <a:prstGeom prst="rect">
             <a:avLst/>
@@ -12882,7 +13114,7 @@
         <p:spPr>
           <a:xfrm>
             <a:off x="2011680" y="777240"/>
-            <a:ext cx="1599840" cy="1234080"/>
+            <a:ext cx="1599480" cy="1233720"/>
           </a:xfrm>
           <a:prstGeom prst="rect">
             <a:avLst/>
@@ -12915,6 +13147,11 @@
             <a:noAutofit/>
           </a:bodyPr>
           <a:p>
+            <a:pPr>
+              <a:lnSpc>
+                <a:spcPct val="100000"/>
+              </a:lnSpc>
+            </a:pPr>
             <a:endParaRPr b="0" lang="en-US" sz="1800" spc="-1" strike="noStrike">
               <a:solidFill>
                 <a:srgbClr val="000000"/>
@@ -12933,7 +13170,7 @@
         <p:spPr>
           <a:xfrm>
             <a:off x="2011680" y="777240"/>
-            <a:ext cx="1599840" cy="54360"/>
+            <a:ext cx="1599480" cy="54000"/>
           </a:xfrm>
           <a:prstGeom prst="rect">
             <a:avLst/>
@@ -12959,6 +13196,11 @@
             <a:noAutofit/>
           </a:bodyPr>
           <a:p>
+            <a:pPr>
+              <a:lnSpc>
+                <a:spcPct val="100000"/>
+              </a:lnSpc>
+            </a:pPr>
             <a:endParaRPr b="0" lang="en-US" sz="1800" spc="-1" strike="noStrike">
               <a:solidFill>
                 <a:srgbClr val="ffffff"/>
@@ -12977,7 +13219,7 @@
         <p:spPr>
           <a:xfrm>
             <a:off x="2011680" y="887040"/>
-            <a:ext cx="1599840" cy="678600"/>
+            <a:ext cx="1599480" cy="678240"/>
           </a:xfrm>
           <a:prstGeom prst="rect">
             <a:avLst/>
@@ -13034,7 +13276,7 @@
         <p:spPr>
           <a:xfrm>
             <a:off x="2103120" y="1542600"/>
-            <a:ext cx="1416960" cy="431640"/>
+            <a:ext cx="1416600" cy="431280"/>
           </a:xfrm>
           <a:prstGeom prst="rect">
             <a:avLst/>
@@ -13091,7 +13333,7 @@
         <p:spPr>
           <a:xfrm>
             <a:off x="3749040" y="777240"/>
-            <a:ext cx="1599840" cy="1234080"/>
+            <a:ext cx="1599480" cy="1233720"/>
           </a:xfrm>
           <a:prstGeom prst="rect">
             <a:avLst/>
@@ -13124,6 +13366,11 @@
             <a:noAutofit/>
           </a:bodyPr>
           <a:p>
+            <a:pPr>
+              <a:lnSpc>
+                <a:spcPct val="100000"/>
+              </a:lnSpc>
+            </a:pPr>
             <a:endParaRPr b="0" lang="en-US" sz="1800" spc="-1" strike="noStrike">
               <a:solidFill>
                 <a:srgbClr val="000000"/>
@@ -13142,7 +13389,7 @@
         <p:spPr>
           <a:xfrm>
             <a:off x="3749040" y="777240"/>
-            <a:ext cx="1599840" cy="54360"/>
+            <a:ext cx="1599480" cy="54000"/>
           </a:xfrm>
           <a:prstGeom prst="rect">
             <a:avLst/>
@@ -13168,6 +13415,11 @@
             <a:noAutofit/>
           </a:bodyPr>
           <a:p>
+            <a:pPr>
+              <a:lnSpc>
+                <a:spcPct val="100000"/>
+              </a:lnSpc>
+            </a:pPr>
             <a:endParaRPr b="0" lang="en-US" sz="1800" spc="-1" strike="noStrike">
               <a:solidFill>
                 <a:srgbClr val="ffffff"/>
@@ -13186,7 +13438,7 @@
         <p:spPr>
           <a:xfrm>
             <a:off x="3749040" y="887040"/>
-            <a:ext cx="1599840" cy="678600"/>
+            <a:ext cx="1599480" cy="678240"/>
           </a:xfrm>
           <a:prstGeom prst="rect">
             <a:avLst/>
@@ -13243,7 +13495,7 @@
         <p:spPr>
           <a:xfrm>
             <a:off x="3840480" y="1542600"/>
-            <a:ext cx="1416960" cy="431640"/>
+            <a:ext cx="1416600" cy="431280"/>
           </a:xfrm>
           <a:prstGeom prst="rect">
             <a:avLst/>
@@ -13300,7 +13552,7 @@
         <p:spPr>
           <a:xfrm>
             <a:off x="5486400" y="777240"/>
-            <a:ext cx="1599840" cy="1234080"/>
+            <a:ext cx="1599480" cy="1233720"/>
           </a:xfrm>
           <a:prstGeom prst="rect">
             <a:avLst/>
@@ -13333,6 +13585,11 @@
             <a:noAutofit/>
           </a:bodyPr>
           <a:p>
+            <a:pPr>
+              <a:lnSpc>
+                <a:spcPct val="100000"/>
+              </a:lnSpc>
+            </a:pPr>
             <a:endParaRPr b="0" lang="en-US" sz="1800" spc="-1" strike="noStrike">
               <a:solidFill>
                 <a:srgbClr val="000000"/>
@@ -13351,7 +13608,7 @@
         <p:spPr>
           <a:xfrm>
             <a:off x="5486400" y="777240"/>
-            <a:ext cx="1599840" cy="54360"/>
+            <a:ext cx="1599480" cy="54000"/>
           </a:xfrm>
           <a:prstGeom prst="rect">
             <a:avLst/>
@@ -13377,6 +13634,11 @@
             <a:noAutofit/>
           </a:bodyPr>
           <a:p>
+            <a:pPr>
+              <a:lnSpc>
+                <a:spcPct val="100000"/>
+              </a:lnSpc>
+            </a:pPr>
             <a:endParaRPr b="0" lang="en-US" sz="1800" spc="-1" strike="noStrike">
               <a:solidFill>
                 <a:srgbClr val="ffffff"/>
@@ -13395,7 +13657,7 @@
         <p:spPr>
           <a:xfrm>
             <a:off x="5486400" y="887040"/>
-            <a:ext cx="1599840" cy="678600"/>
+            <a:ext cx="1599480" cy="678240"/>
           </a:xfrm>
           <a:prstGeom prst="rect">
             <a:avLst/>
@@ -13452,7 +13714,7 @@
         <p:spPr>
           <a:xfrm>
             <a:off x="5577840" y="1542600"/>
-            <a:ext cx="1416960" cy="431640"/>
+            <a:ext cx="1416600" cy="431280"/>
           </a:xfrm>
           <a:prstGeom prst="rect">
             <a:avLst/>
@@ -13509,7 +13771,7 @@
         <p:spPr>
           <a:xfrm>
             <a:off x="7223760" y="777240"/>
-            <a:ext cx="1599840" cy="1234080"/>
+            <a:ext cx="1599480" cy="1233720"/>
           </a:xfrm>
           <a:prstGeom prst="rect">
             <a:avLst/>
@@ -13542,6 +13804,11 @@
             <a:noAutofit/>
           </a:bodyPr>
           <a:p>
+            <a:pPr>
+              <a:lnSpc>
+                <a:spcPct val="100000"/>
+              </a:lnSpc>
+            </a:pPr>
             <a:endParaRPr b="0" lang="en-US" sz="1800" spc="-1" strike="noStrike">
               <a:solidFill>
                 <a:srgbClr val="000000"/>
@@ -13560,7 +13827,7 @@
         <p:spPr>
           <a:xfrm>
             <a:off x="7223760" y="777240"/>
-            <a:ext cx="1599840" cy="54360"/>
+            <a:ext cx="1599480" cy="54000"/>
           </a:xfrm>
           <a:prstGeom prst="rect">
             <a:avLst/>
@@ -13586,6 +13853,11 @@
             <a:noAutofit/>
           </a:bodyPr>
           <a:p>
+            <a:pPr>
+              <a:lnSpc>
+                <a:spcPct val="100000"/>
+              </a:lnSpc>
+            </a:pPr>
             <a:endParaRPr b="0" lang="en-US" sz="1800" spc="-1" strike="noStrike">
               <a:solidFill>
                 <a:srgbClr val="ffffff"/>
@@ -13604,7 +13876,7 @@
         <p:spPr>
           <a:xfrm>
             <a:off x="7223760" y="887040"/>
-            <a:ext cx="1599840" cy="678600"/>
+            <a:ext cx="1599480" cy="678240"/>
           </a:xfrm>
           <a:prstGeom prst="rect">
             <a:avLst/>
@@ -13661,7 +13933,7 @@
         <p:spPr>
           <a:xfrm>
             <a:off x="7315200" y="1542600"/>
-            <a:ext cx="1416960" cy="431640"/>
+            <a:ext cx="1416600" cy="431280"/>
           </a:xfrm>
           <a:prstGeom prst="rect">
             <a:avLst/>
@@ -13717,7 +13989,7 @@
         </p:nvGraphicFramePr>
         <p:xfrm>
           <a:off x="274320" y="2148840"/>
-          <a:ext cx="4114440" cy="2559960"/>
+          <a:ext cx="4114080" cy="2559600"/>
         </p:xfrm>
         <a:graphic>
           <a:graphicData uri="http://schemas.openxmlformats.org/drawingml/2006/chart">
@@ -13733,7 +14005,7 @@
         </p:nvGraphicFramePr>
         <p:xfrm>
           <a:off x="4572000" y="2148840"/>
-          <a:ext cx="4297320" cy="2559960"/>
+          <a:ext cx="4296960" cy="2559600"/>
         </p:xfrm>
         <a:graphic>
           <a:graphicData uri="http://schemas.openxmlformats.org/drawingml/2006/chart">
@@ -13787,7 +14059,7 @@
         <p:spPr>
           <a:xfrm>
             <a:off x="0" y="0"/>
-            <a:ext cx="9143640" cy="658080"/>
+            <a:ext cx="9143280" cy="657720"/>
           </a:xfrm>
           <a:prstGeom prst="rect">
             <a:avLst/>
@@ -13813,6 +14085,11 @@
             <a:noAutofit/>
           </a:bodyPr>
           <a:p>
+            <a:pPr>
+              <a:lnSpc>
+                <a:spcPct val="100000"/>
+              </a:lnSpc>
+            </a:pPr>
             <a:endParaRPr b="0" lang="en-US" sz="1800" spc="-1" strike="noStrike">
               <a:solidFill>
                 <a:srgbClr val="ffffff"/>
@@ -13831,7 +14108,7 @@
         <p:spPr>
           <a:xfrm>
             <a:off x="365760" y="0"/>
-            <a:ext cx="6857640" cy="658080"/>
+            <a:ext cx="6857280" cy="657720"/>
           </a:xfrm>
           <a:prstGeom prst="rect">
             <a:avLst/>
@@ -13888,7 +14165,7 @@
         <p:spPr>
           <a:xfrm>
             <a:off x="0" y="0"/>
-            <a:ext cx="8777880" cy="658080"/>
+            <a:ext cx="8777520" cy="657720"/>
           </a:xfrm>
           <a:prstGeom prst="rect">
             <a:avLst/>
@@ -13945,7 +14222,7 @@
         <p:spPr>
           <a:xfrm>
             <a:off x="0" y="4864680"/>
-            <a:ext cx="9143640" cy="273960"/>
+            <a:ext cx="9143280" cy="273600"/>
           </a:xfrm>
           <a:prstGeom prst="rect">
             <a:avLst/>
@@ -14001,7 +14278,7 @@
         </p:nvGraphicFramePr>
         <p:xfrm>
           <a:off x="274320" y="777240"/>
-          <a:ext cx="4114440" cy="2559960"/>
+          <a:ext cx="4114080" cy="2559600"/>
         </p:xfrm>
         <a:graphic>
           <a:graphicData uri="http://schemas.openxmlformats.org/drawingml/2006/chart">
@@ -14017,7 +14294,7 @@
         </p:nvGraphicFramePr>
         <p:xfrm>
           <a:off x="4572000" y="777240"/>
-          <a:ext cx="4297320" cy="2559960"/>
+          <a:ext cx="4296960" cy="2559600"/>
         </p:xfrm>
         <a:graphic>
           <a:graphicData uri="http://schemas.openxmlformats.org/drawingml/2006/chart">
@@ -14034,7 +14311,7 @@
         <p:spPr>
           <a:xfrm>
             <a:off x="274320" y="3474720"/>
-            <a:ext cx="8595000" cy="1325520"/>
+            <a:ext cx="8594640" cy="1325160"/>
           </a:xfrm>
           <a:prstGeom prst="rect">
             <a:avLst/>
@@ -14067,6 +14344,11 @@
             <a:noAutofit/>
           </a:bodyPr>
           <a:p>
+            <a:pPr>
+              <a:lnSpc>
+                <a:spcPct val="100000"/>
+              </a:lnSpc>
+            </a:pPr>
             <a:endParaRPr b="0" lang="en-US" sz="1800" spc="-1" strike="noStrike">
               <a:solidFill>
                 <a:srgbClr val="ffffff"/>
@@ -14085,7 +14367,7 @@
         <p:spPr>
           <a:xfrm>
             <a:off x="502920" y="3547800"/>
-            <a:ext cx="1828440" cy="273960"/>
+            <a:ext cx="1828080" cy="273600"/>
           </a:xfrm>
           <a:prstGeom prst="rect">
             <a:avLst/>
@@ -14142,7 +14424,7 @@
         <p:spPr>
           <a:xfrm>
             <a:off x="502920" y="3858840"/>
-            <a:ext cx="8320680" cy="822600"/>
+            <a:ext cx="8320320" cy="822240"/>
           </a:xfrm>
           <a:prstGeom prst="rect">
             <a:avLst/>
@@ -14256,7 +14538,7 @@
         <p:spPr>
           <a:xfrm>
             <a:off x="0" y="0"/>
-            <a:ext cx="9143640" cy="658080"/>
+            <a:ext cx="9143280" cy="657720"/>
           </a:xfrm>
           <a:prstGeom prst="rect">
             <a:avLst/>
@@ -14282,6 +14564,11 @@
             <a:noAutofit/>
           </a:bodyPr>
           <a:p>
+            <a:pPr>
+              <a:lnSpc>
+                <a:spcPct val="100000"/>
+              </a:lnSpc>
+            </a:pPr>
             <a:endParaRPr b="0" lang="en-US" sz="1800" spc="-1" strike="noStrike">
               <a:solidFill>
                 <a:srgbClr val="ffffff"/>
@@ -14300,7 +14587,7 @@
         <p:spPr>
           <a:xfrm>
             <a:off x="365760" y="0"/>
-            <a:ext cx="6857640" cy="658080"/>
+            <a:ext cx="6857280" cy="657720"/>
           </a:xfrm>
           <a:prstGeom prst="rect">
             <a:avLst/>
@@ -14357,7 +14644,7 @@
         <p:spPr>
           <a:xfrm>
             <a:off x="0" y="0"/>
-            <a:ext cx="8777880" cy="658080"/>
+            <a:ext cx="8777520" cy="657720"/>
           </a:xfrm>
           <a:prstGeom prst="rect">
             <a:avLst/>
@@ -14414,7 +14701,7 @@
         <p:spPr>
           <a:xfrm>
             <a:off x="0" y="4864680"/>
-            <a:ext cx="9143640" cy="273960"/>
+            <a:ext cx="9143280" cy="273600"/>
           </a:xfrm>
           <a:prstGeom prst="rect">
             <a:avLst/>
@@ -14470,7 +14757,7 @@
         </p:nvGraphicFramePr>
         <p:xfrm>
           <a:off x="274320" y="777240"/>
-          <a:ext cx="4114440" cy="2559960"/>
+          <a:ext cx="4114080" cy="2559600"/>
         </p:xfrm>
         <a:graphic>
           <a:graphicData uri="http://schemas.openxmlformats.org/drawingml/2006/chart">
@@ -14486,7 +14773,7 @@
         </p:nvGraphicFramePr>
         <p:xfrm>
           <a:off x="4572000" y="777240"/>
-          <a:ext cx="4297320" cy="2559960"/>
+          <a:ext cx="4296960" cy="2559600"/>
         </p:xfrm>
         <a:graphic>
           <a:graphicData uri="http://schemas.openxmlformats.org/drawingml/2006/chart">
@@ -14503,7 +14790,7 @@
         <p:spPr>
           <a:xfrm>
             <a:off x="274320" y="3474720"/>
-            <a:ext cx="8595000" cy="1325520"/>
+            <a:ext cx="8594640" cy="1325160"/>
           </a:xfrm>
           <a:prstGeom prst="rect">
             <a:avLst/>
@@ -14536,6 +14823,11 @@
             <a:noAutofit/>
           </a:bodyPr>
           <a:p>
+            <a:pPr>
+              <a:lnSpc>
+                <a:spcPct val="100000"/>
+              </a:lnSpc>
+            </a:pPr>
             <a:endParaRPr b="0" lang="en-US" sz="1800" spc="-1" strike="noStrike">
               <a:solidFill>
                 <a:srgbClr val="ffffff"/>
@@ -14554,7 +14846,7 @@
         <p:spPr>
           <a:xfrm>
             <a:off x="502920" y="3547800"/>
-            <a:ext cx="1828440" cy="273960"/>
+            <a:ext cx="1828080" cy="273600"/>
           </a:xfrm>
           <a:prstGeom prst="rect">
             <a:avLst/>
@@ -14611,7 +14903,7 @@
         <p:spPr>
           <a:xfrm>
             <a:off x="502920" y="3858840"/>
-            <a:ext cx="8320680" cy="822600"/>
+            <a:ext cx="8320320" cy="822240"/>
           </a:xfrm>
           <a:prstGeom prst="rect">
             <a:avLst/>
@@ -14715,7 +15007,7 @@
         <p:spPr>
           <a:xfrm>
             <a:off x="0" y="0"/>
-            <a:ext cx="9143640" cy="658080"/>
+            <a:ext cx="9143280" cy="657720"/>
           </a:xfrm>
           <a:prstGeom prst="rect">
             <a:avLst/>
@@ -14741,6 +15033,11 @@
             <a:noAutofit/>
           </a:bodyPr>
           <a:p>
+            <a:pPr>
+              <a:lnSpc>
+                <a:spcPct val="100000"/>
+              </a:lnSpc>
+            </a:pPr>
             <a:endParaRPr b="0" lang="en-US" sz="1800" spc="-1" strike="noStrike">
               <a:solidFill>
                 <a:srgbClr val="ffffff"/>
@@ -14759,7 +15056,7 @@
         <p:spPr>
           <a:xfrm>
             <a:off x="365760" y="0"/>
-            <a:ext cx="6857640" cy="658080"/>
+            <a:ext cx="6857280" cy="657720"/>
           </a:xfrm>
           <a:prstGeom prst="rect">
             <a:avLst/>
@@ -14816,7 +15113,7 @@
         <p:spPr>
           <a:xfrm>
             <a:off x="0" y="0"/>
-            <a:ext cx="8777880" cy="658080"/>
+            <a:ext cx="8777520" cy="657720"/>
           </a:xfrm>
           <a:prstGeom prst="rect">
             <a:avLst/>
@@ -14873,7 +15170,7 @@
         <p:spPr>
           <a:xfrm>
             <a:off x="0" y="4864680"/>
-            <a:ext cx="9143640" cy="273960"/>
+            <a:ext cx="9143280" cy="273600"/>
           </a:xfrm>
           <a:prstGeom prst="rect">
             <a:avLst/>
@@ -14930,7 +15227,7 @@
         <p:spPr>
           <a:xfrm>
             <a:off x="274320" y="777240"/>
-            <a:ext cx="1965600" cy="1096920"/>
+            <a:ext cx="1965240" cy="1096560"/>
           </a:xfrm>
           <a:prstGeom prst="rect">
             <a:avLst/>
@@ -14963,6 +15260,11 @@
             <a:noAutofit/>
           </a:bodyPr>
           <a:p>
+            <a:pPr>
+              <a:lnSpc>
+                <a:spcPct val="100000"/>
+              </a:lnSpc>
+            </a:pPr>
             <a:endParaRPr b="0" lang="en-US" sz="1800" spc="-1" strike="noStrike">
               <a:solidFill>
                 <a:srgbClr val="000000"/>
@@ -14981,7 +15283,7 @@
         <p:spPr>
           <a:xfrm>
             <a:off x="274320" y="777240"/>
-            <a:ext cx="1965600" cy="54360"/>
+            <a:ext cx="1965240" cy="54000"/>
           </a:xfrm>
           <a:prstGeom prst="rect">
             <a:avLst/>
@@ -15007,6 +15309,11 @@
             <a:noAutofit/>
           </a:bodyPr>
           <a:p>
+            <a:pPr>
+              <a:lnSpc>
+                <a:spcPct val="100000"/>
+              </a:lnSpc>
+            </a:pPr>
             <a:endParaRPr b="0" lang="en-US" sz="1800" spc="-1" strike="noStrike">
               <a:solidFill>
                 <a:srgbClr val="ffffff"/>
@@ -15025,7 +15332,7 @@
         <p:spPr>
           <a:xfrm>
             <a:off x="274320" y="887040"/>
-            <a:ext cx="1965600" cy="603000"/>
+            <a:ext cx="1965240" cy="602640"/>
           </a:xfrm>
           <a:prstGeom prst="rect">
             <a:avLst/>
@@ -15082,7 +15389,7 @@
         <p:spPr>
           <a:xfrm>
             <a:off x="365760" y="1457640"/>
-            <a:ext cx="1782720" cy="383760"/>
+            <a:ext cx="1782360" cy="383400"/>
           </a:xfrm>
           <a:prstGeom prst="rect">
             <a:avLst/>
@@ -15139,7 +15446,7 @@
         <p:spPr>
           <a:xfrm>
             <a:off x="2377440" y="777240"/>
-            <a:ext cx="1965600" cy="1096920"/>
+            <a:ext cx="1965240" cy="1096560"/>
           </a:xfrm>
           <a:prstGeom prst="rect">
             <a:avLst/>
@@ -15172,6 +15479,11 @@
             <a:noAutofit/>
           </a:bodyPr>
           <a:p>
+            <a:pPr>
+              <a:lnSpc>
+                <a:spcPct val="100000"/>
+              </a:lnSpc>
+            </a:pPr>
             <a:endParaRPr b="0" lang="en-US" sz="1800" spc="-1" strike="noStrike">
               <a:solidFill>
                 <a:srgbClr val="000000"/>
@@ -15190,7 +15502,7 @@
         <p:spPr>
           <a:xfrm>
             <a:off x="2377440" y="777240"/>
-            <a:ext cx="1965600" cy="54360"/>
+            <a:ext cx="1965240" cy="54000"/>
           </a:xfrm>
           <a:prstGeom prst="rect">
             <a:avLst/>
@@ -15216,6 +15528,11 @@
             <a:noAutofit/>
           </a:bodyPr>
           <a:p>
+            <a:pPr>
+              <a:lnSpc>
+                <a:spcPct val="100000"/>
+              </a:lnSpc>
+            </a:pPr>
             <a:endParaRPr b="0" lang="en-US" sz="1800" spc="-1" strike="noStrike">
               <a:solidFill>
                 <a:srgbClr val="ffffff"/>
@@ -15234,7 +15551,7 @@
         <p:spPr>
           <a:xfrm>
             <a:off x="2377440" y="887040"/>
-            <a:ext cx="1965600" cy="603000"/>
+            <a:ext cx="1965240" cy="602640"/>
           </a:xfrm>
           <a:prstGeom prst="rect">
             <a:avLst/>
@@ -15291,7 +15608,7 @@
         <p:spPr>
           <a:xfrm>
             <a:off x="2468880" y="1457640"/>
-            <a:ext cx="1782720" cy="383760"/>
+            <a:ext cx="1782360" cy="383400"/>
           </a:xfrm>
           <a:prstGeom prst="rect">
             <a:avLst/>
@@ -15348,7 +15665,7 @@
         <p:spPr>
           <a:xfrm>
             <a:off x="4480560" y="777240"/>
-            <a:ext cx="1965600" cy="1096920"/>
+            <a:ext cx="1965240" cy="1096560"/>
           </a:xfrm>
           <a:prstGeom prst="rect">
             <a:avLst/>
@@ -15381,6 +15698,11 @@
             <a:noAutofit/>
           </a:bodyPr>
           <a:p>
+            <a:pPr>
+              <a:lnSpc>
+                <a:spcPct val="100000"/>
+              </a:lnSpc>
+            </a:pPr>
             <a:endParaRPr b="0" lang="en-US" sz="1800" spc="-1" strike="noStrike">
               <a:solidFill>
                 <a:srgbClr val="000000"/>
@@ -15399,7 +15721,7 @@
         <p:spPr>
           <a:xfrm>
             <a:off x="4480560" y="777240"/>
-            <a:ext cx="1965600" cy="54360"/>
+            <a:ext cx="1965240" cy="54000"/>
           </a:xfrm>
           <a:prstGeom prst="rect">
             <a:avLst/>
@@ -15425,6 +15747,11 @@
             <a:noAutofit/>
           </a:bodyPr>
           <a:p>
+            <a:pPr>
+              <a:lnSpc>
+                <a:spcPct val="100000"/>
+              </a:lnSpc>
+            </a:pPr>
             <a:endParaRPr b="0" lang="en-US" sz="1800" spc="-1" strike="noStrike">
               <a:solidFill>
                 <a:srgbClr val="ffffff"/>
@@ -15443,7 +15770,7 @@
         <p:spPr>
           <a:xfrm>
             <a:off x="4480560" y="887040"/>
-            <a:ext cx="1965600" cy="603000"/>
+            <a:ext cx="1965240" cy="602640"/>
           </a:xfrm>
           <a:prstGeom prst="rect">
             <a:avLst/>
@@ -15500,7 +15827,7 @@
         <p:spPr>
           <a:xfrm>
             <a:off x="4572000" y="1457640"/>
-            <a:ext cx="1782720" cy="383760"/>
+            <a:ext cx="1782360" cy="383400"/>
           </a:xfrm>
           <a:prstGeom prst="rect">
             <a:avLst/>
@@ -15557,7 +15884,7 @@
         <p:spPr>
           <a:xfrm>
             <a:off x="6583680" y="777240"/>
-            <a:ext cx="1965600" cy="1096920"/>
+            <a:ext cx="1965240" cy="1096560"/>
           </a:xfrm>
           <a:prstGeom prst="rect">
             <a:avLst/>
@@ -15590,6 +15917,11 @@
             <a:noAutofit/>
           </a:bodyPr>
           <a:p>
+            <a:pPr>
+              <a:lnSpc>
+                <a:spcPct val="100000"/>
+              </a:lnSpc>
+            </a:pPr>
             <a:endParaRPr b="0" lang="en-US" sz="1800" spc="-1" strike="noStrike">
               <a:solidFill>
                 <a:srgbClr val="000000"/>
@@ -15608,7 +15940,7 @@
         <p:spPr>
           <a:xfrm>
             <a:off x="6583680" y="777240"/>
-            <a:ext cx="1965600" cy="54360"/>
+            <a:ext cx="1965240" cy="54000"/>
           </a:xfrm>
           <a:prstGeom prst="rect">
             <a:avLst/>
@@ -15634,6 +15966,11 @@
             <a:noAutofit/>
           </a:bodyPr>
           <a:p>
+            <a:pPr>
+              <a:lnSpc>
+                <a:spcPct val="100000"/>
+              </a:lnSpc>
+            </a:pPr>
             <a:endParaRPr b="0" lang="en-US" sz="1800" spc="-1" strike="noStrike">
               <a:solidFill>
                 <a:srgbClr val="ffffff"/>
@@ -15652,7 +15989,7 @@
         <p:spPr>
           <a:xfrm>
             <a:off x="6583680" y="887040"/>
-            <a:ext cx="1965600" cy="603000"/>
+            <a:ext cx="1965240" cy="602640"/>
           </a:xfrm>
           <a:prstGeom prst="rect">
             <a:avLst/>
@@ -15709,7 +16046,7 @@
         <p:spPr>
           <a:xfrm>
             <a:off x="6675120" y="1457640"/>
-            <a:ext cx="1782720" cy="383760"/>
+            <a:ext cx="1782360" cy="383400"/>
           </a:xfrm>
           <a:prstGeom prst="rect">
             <a:avLst/>
@@ -15765,7 +16102,7 @@
         </p:nvGraphicFramePr>
         <p:xfrm>
           <a:off x="274320" y="2011680"/>
-          <a:ext cx="4114440" cy="2651400"/>
+          <a:ext cx="4114080" cy="2651040"/>
         </p:xfrm>
         <a:graphic>
           <a:graphicData uri="http://schemas.openxmlformats.org/drawingml/2006/chart">
@@ -15781,7 +16118,7 @@
         </p:nvGraphicFramePr>
         <p:xfrm>
           <a:off x="4572000" y="2011680"/>
-          <a:ext cx="4297320" cy="2651400"/>
+          <a:ext cx="4296960" cy="2651040"/>
         </p:xfrm>
         <a:graphic>
           <a:graphicData uri="http://schemas.openxmlformats.org/drawingml/2006/chart">
@@ -15835,7 +16172,7 @@
         <p:spPr>
           <a:xfrm>
             <a:off x="0" y="0"/>
-            <a:ext cx="9143640" cy="658080"/>
+            <a:ext cx="9143280" cy="657720"/>
           </a:xfrm>
           <a:prstGeom prst="rect">
             <a:avLst/>
@@ -15861,6 +16198,11 @@
             <a:noAutofit/>
           </a:bodyPr>
           <a:p>
+            <a:pPr>
+              <a:lnSpc>
+                <a:spcPct val="100000"/>
+              </a:lnSpc>
+            </a:pPr>
             <a:endParaRPr b="0" lang="en-US" sz="1800" spc="-1" strike="noStrike">
               <a:solidFill>
                 <a:srgbClr val="ffffff"/>
@@ -15879,7 +16221,7 @@
         <p:spPr>
           <a:xfrm>
             <a:off x="365760" y="0"/>
-            <a:ext cx="6857640" cy="658080"/>
+            <a:ext cx="6857280" cy="657720"/>
           </a:xfrm>
           <a:prstGeom prst="rect">
             <a:avLst/>
@@ -15936,7 +16278,7 @@
         <p:spPr>
           <a:xfrm>
             <a:off x="0" y="0"/>
-            <a:ext cx="8777880" cy="658080"/>
+            <a:ext cx="8777520" cy="657720"/>
           </a:xfrm>
           <a:prstGeom prst="rect">
             <a:avLst/>
@@ -15993,7 +16335,7 @@
         <p:spPr>
           <a:xfrm>
             <a:off x="0" y="4864680"/>
-            <a:ext cx="9143640" cy="273960"/>
+            <a:ext cx="9143280" cy="273600"/>
           </a:xfrm>
           <a:prstGeom prst="rect">
             <a:avLst/>
@@ -16050,7 +16392,7 @@
         <p:spPr>
           <a:xfrm>
             <a:off x="274320" y="777240"/>
-            <a:ext cx="2651400" cy="1096920"/>
+            <a:ext cx="2651040" cy="1096560"/>
           </a:xfrm>
           <a:prstGeom prst="rect">
             <a:avLst/>
@@ -16083,6 +16425,11 @@
             <a:noAutofit/>
           </a:bodyPr>
           <a:p>
+            <a:pPr>
+              <a:lnSpc>
+                <a:spcPct val="100000"/>
+              </a:lnSpc>
+            </a:pPr>
             <a:endParaRPr b="0" lang="en-US" sz="1800" spc="-1" strike="noStrike">
               <a:solidFill>
                 <a:srgbClr val="000000"/>
@@ -16101,7 +16448,7 @@
         <p:spPr>
           <a:xfrm>
             <a:off x="274320" y="777240"/>
-            <a:ext cx="2651400" cy="54360"/>
+            <a:ext cx="2651040" cy="54000"/>
           </a:xfrm>
           <a:prstGeom prst="rect">
             <a:avLst/>
@@ -16127,6 +16474,11 @@
             <a:noAutofit/>
           </a:bodyPr>
           <a:p>
+            <a:pPr>
+              <a:lnSpc>
+                <a:spcPct val="100000"/>
+              </a:lnSpc>
+            </a:pPr>
             <a:endParaRPr b="0" lang="en-US" sz="1800" spc="-1" strike="noStrike">
               <a:solidFill>
                 <a:srgbClr val="ffffff"/>
@@ -16145,7 +16497,7 @@
         <p:spPr>
           <a:xfrm>
             <a:off x="274320" y="887040"/>
-            <a:ext cx="2651400" cy="603000"/>
+            <a:ext cx="2651040" cy="602640"/>
           </a:xfrm>
           <a:prstGeom prst="rect">
             <a:avLst/>
@@ -16202,7 +16554,7 @@
         <p:spPr>
           <a:xfrm>
             <a:off x="365760" y="1457640"/>
-            <a:ext cx="2468520" cy="383760"/>
+            <a:ext cx="2468160" cy="383400"/>
           </a:xfrm>
           <a:prstGeom prst="rect">
             <a:avLst/>
@@ -16259,7 +16611,7 @@
         <p:spPr>
           <a:xfrm>
             <a:off x="3108960" y="777240"/>
-            <a:ext cx="2651400" cy="1096920"/>
+            <a:ext cx="2651040" cy="1096560"/>
           </a:xfrm>
           <a:prstGeom prst="rect">
             <a:avLst/>
@@ -16292,6 +16644,11 @@
             <a:noAutofit/>
           </a:bodyPr>
           <a:p>
+            <a:pPr>
+              <a:lnSpc>
+                <a:spcPct val="100000"/>
+              </a:lnSpc>
+            </a:pPr>
             <a:endParaRPr b="0" lang="en-US" sz="1800" spc="-1" strike="noStrike">
               <a:solidFill>
                 <a:srgbClr val="000000"/>
@@ -16310,7 +16667,7 @@
         <p:spPr>
           <a:xfrm>
             <a:off x="3108960" y="777240"/>
-            <a:ext cx="2651400" cy="54360"/>
+            <a:ext cx="2651040" cy="54000"/>
           </a:xfrm>
           <a:prstGeom prst="rect">
             <a:avLst/>
@@ -16336,6 +16693,11 @@
             <a:noAutofit/>
           </a:bodyPr>
           <a:p>
+            <a:pPr>
+              <a:lnSpc>
+                <a:spcPct val="100000"/>
+              </a:lnSpc>
+            </a:pPr>
             <a:endParaRPr b="0" lang="en-US" sz="1800" spc="-1" strike="noStrike">
               <a:solidFill>
                 <a:srgbClr val="ffffff"/>
@@ -16354,7 +16716,7 @@
         <p:spPr>
           <a:xfrm>
             <a:off x="3108960" y="887040"/>
-            <a:ext cx="2651400" cy="603000"/>
+            <a:ext cx="2651040" cy="602640"/>
           </a:xfrm>
           <a:prstGeom prst="rect">
             <a:avLst/>
@@ -16411,7 +16773,7 @@
         <p:spPr>
           <a:xfrm>
             <a:off x="3200400" y="1457640"/>
-            <a:ext cx="2468520" cy="383760"/>
+            <a:ext cx="2468160" cy="383400"/>
           </a:xfrm>
           <a:prstGeom prst="rect">
             <a:avLst/>
@@ -16468,7 +16830,7 @@
         <p:spPr>
           <a:xfrm>
             <a:off x="5943600" y="777240"/>
-            <a:ext cx="2651400" cy="1096920"/>
+            <a:ext cx="2651040" cy="1096560"/>
           </a:xfrm>
           <a:prstGeom prst="rect">
             <a:avLst/>
@@ -16501,6 +16863,11 @@
             <a:noAutofit/>
           </a:bodyPr>
           <a:p>
+            <a:pPr>
+              <a:lnSpc>
+                <a:spcPct val="100000"/>
+              </a:lnSpc>
+            </a:pPr>
             <a:endParaRPr b="0" lang="en-US" sz="1800" spc="-1" strike="noStrike">
               <a:solidFill>
                 <a:srgbClr val="000000"/>
@@ -16519,7 +16886,7 @@
         <p:spPr>
           <a:xfrm>
             <a:off x="5943600" y="777240"/>
-            <a:ext cx="2651400" cy="54360"/>
+            <a:ext cx="2651040" cy="54000"/>
           </a:xfrm>
           <a:prstGeom prst="rect">
             <a:avLst/>
@@ -16545,6 +16912,11 @@
             <a:noAutofit/>
           </a:bodyPr>
           <a:p>
+            <a:pPr>
+              <a:lnSpc>
+                <a:spcPct val="100000"/>
+              </a:lnSpc>
+            </a:pPr>
             <a:endParaRPr b="0" lang="en-US" sz="1800" spc="-1" strike="noStrike">
               <a:solidFill>
                 <a:srgbClr val="ffffff"/>
@@ -16563,7 +16935,7 @@
         <p:spPr>
           <a:xfrm>
             <a:off x="5943600" y="887040"/>
-            <a:ext cx="2651400" cy="603000"/>
+            <a:ext cx="2651040" cy="602640"/>
           </a:xfrm>
           <a:prstGeom prst="rect">
             <a:avLst/>
@@ -16620,7 +16992,7 @@
         <p:spPr>
           <a:xfrm>
             <a:off x="6035040" y="1457640"/>
-            <a:ext cx="2468520" cy="383760"/>
+            <a:ext cx="2468160" cy="383400"/>
           </a:xfrm>
           <a:prstGeom prst="rect">
             <a:avLst/>
@@ -16676,7 +17048,7 @@
         </p:nvGraphicFramePr>
         <p:xfrm>
           <a:off x="274320" y="2011680"/>
-          <a:ext cx="4114440" cy="2651400"/>
+          <a:ext cx="4114080" cy="2651040"/>
         </p:xfrm>
         <a:graphic>
           <a:graphicData uri="http://schemas.openxmlformats.org/drawingml/2006/chart">
@@ -16692,7 +17064,7 @@
         </p:nvGraphicFramePr>
         <p:xfrm>
           <a:off x="4572000" y="2011680"/>
-          <a:ext cx="4297320" cy="2651400"/>
+          <a:ext cx="4296960" cy="2651040"/>
         </p:xfrm>
         <a:graphic>
           <a:graphicData uri="http://schemas.openxmlformats.org/drawingml/2006/chart">
@@ -16746,7 +17118,7 @@
         <p:spPr>
           <a:xfrm>
             <a:off x="0" y="0"/>
-            <a:ext cx="9143640" cy="658080"/>
+            <a:ext cx="9143280" cy="657720"/>
           </a:xfrm>
           <a:prstGeom prst="rect">
             <a:avLst/>
@@ -16772,6 +17144,11 @@
             <a:noAutofit/>
           </a:bodyPr>
           <a:p>
+            <a:pPr>
+              <a:lnSpc>
+                <a:spcPct val="100000"/>
+              </a:lnSpc>
+            </a:pPr>
             <a:endParaRPr b="0" lang="en-US" sz="1800" spc="-1" strike="noStrike">
               <a:solidFill>
                 <a:srgbClr val="ffffff"/>
@@ -16790,7 +17167,7 @@
         <p:spPr>
           <a:xfrm>
             <a:off x="365760" y="0"/>
-            <a:ext cx="6857640" cy="658080"/>
+            <a:ext cx="6857280" cy="657720"/>
           </a:xfrm>
           <a:prstGeom prst="rect">
             <a:avLst/>
@@ -16847,7 +17224,7 @@
         <p:spPr>
           <a:xfrm>
             <a:off x="0" y="0"/>
-            <a:ext cx="8777880" cy="658080"/>
+            <a:ext cx="8777520" cy="657720"/>
           </a:xfrm>
           <a:prstGeom prst="rect">
             <a:avLst/>
@@ -16904,7 +17281,7 @@
         <p:spPr>
           <a:xfrm>
             <a:off x="0" y="4864680"/>
-            <a:ext cx="9143640" cy="273960"/>
+            <a:ext cx="9143280" cy="273600"/>
           </a:xfrm>
           <a:prstGeom prst="rect">
             <a:avLst/>
@@ -16961,7 +17338,7 @@
         <p:spPr>
           <a:xfrm>
             <a:off x="274320" y="777240"/>
-            <a:ext cx="1965600" cy="1096920"/>
+            <a:ext cx="1965240" cy="1096560"/>
           </a:xfrm>
           <a:prstGeom prst="rect">
             <a:avLst/>
@@ -16994,6 +17371,11 @@
             <a:noAutofit/>
           </a:bodyPr>
           <a:p>
+            <a:pPr>
+              <a:lnSpc>
+                <a:spcPct val="100000"/>
+              </a:lnSpc>
+            </a:pPr>
             <a:endParaRPr b="0" lang="en-US" sz="1800" spc="-1" strike="noStrike">
               <a:solidFill>
                 <a:srgbClr val="000000"/>
@@ -17012,7 +17394,7 @@
         <p:spPr>
           <a:xfrm>
             <a:off x="274320" y="777240"/>
-            <a:ext cx="1965600" cy="54360"/>
+            <a:ext cx="1965240" cy="54000"/>
           </a:xfrm>
           <a:prstGeom prst="rect">
             <a:avLst/>
@@ -17038,6 +17420,11 @@
             <a:noAutofit/>
           </a:bodyPr>
           <a:p>
+            <a:pPr>
+              <a:lnSpc>
+                <a:spcPct val="100000"/>
+              </a:lnSpc>
+            </a:pPr>
             <a:endParaRPr b="0" lang="en-US" sz="1800" spc="-1" strike="noStrike">
               <a:solidFill>
                 <a:srgbClr val="ffffff"/>
@@ -17056,7 +17443,7 @@
         <p:spPr>
           <a:xfrm>
             <a:off x="274320" y="887040"/>
-            <a:ext cx="1965600" cy="603000"/>
+            <a:ext cx="1965240" cy="602640"/>
           </a:xfrm>
           <a:prstGeom prst="rect">
             <a:avLst/>
@@ -17113,7 +17500,7 @@
         <p:spPr>
           <a:xfrm>
             <a:off x="365760" y="1457640"/>
-            <a:ext cx="1782720" cy="383760"/>
+            <a:ext cx="1782360" cy="383400"/>
           </a:xfrm>
           <a:prstGeom prst="rect">
             <a:avLst/>
@@ -17170,7 +17557,7 @@
         <p:spPr>
           <a:xfrm>
             <a:off x="2377440" y="777240"/>
-            <a:ext cx="1965600" cy="1096920"/>
+            <a:ext cx="1965240" cy="1096560"/>
           </a:xfrm>
           <a:prstGeom prst="rect">
             <a:avLst/>
@@ -17203,6 +17590,11 @@
             <a:noAutofit/>
           </a:bodyPr>
           <a:p>
+            <a:pPr>
+              <a:lnSpc>
+                <a:spcPct val="100000"/>
+              </a:lnSpc>
+            </a:pPr>
             <a:endParaRPr b="0" lang="en-US" sz="1800" spc="-1" strike="noStrike">
               <a:solidFill>
                 <a:srgbClr val="000000"/>
@@ -17221,7 +17613,7 @@
         <p:spPr>
           <a:xfrm>
             <a:off x="2377440" y="777240"/>
-            <a:ext cx="1965600" cy="54360"/>
+            <a:ext cx="1965240" cy="54000"/>
           </a:xfrm>
           <a:prstGeom prst="rect">
             <a:avLst/>
@@ -17247,6 +17639,11 @@
             <a:noAutofit/>
           </a:bodyPr>
           <a:p>
+            <a:pPr>
+              <a:lnSpc>
+                <a:spcPct val="100000"/>
+              </a:lnSpc>
+            </a:pPr>
             <a:endParaRPr b="0" lang="en-US" sz="1800" spc="-1" strike="noStrike">
               <a:solidFill>
                 <a:srgbClr val="ffffff"/>
@@ -17265,7 +17662,7 @@
         <p:spPr>
           <a:xfrm>
             <a:off x="2377440" y="887040"/>
-            <a:ext cx="1965600" cy="603000"/>
+            <a:ext cx="1965240" cy="602640"/>
           </a:xfrm>
           <a:prstGeom prst="rect">
             <a:avLst/>
@@ -17322,7 +17719,7 @@
         <p:spPr>
           <a:xfrm>
             <a:off x="2468880" y="1457640"/>
-            <a:ext cx="1782720" cy="383760"/>
+            <a:ext cx="1782360" cy="383400"/>
           </a:xfrm>
           <a:prstGeom prst="rect">
             <a:avLst/>
@@ -17379,7 +17776,7 @@
         <p:spPr>
           <a:xfrm>
             <a:off x="4480560" y="777240"/>
-            <a:ext cx="1965600" cy="1096920"/>
+            <a:ext cx="1965240" cy="1096560"/>
           </a:xfrm>
           <a:prstGeom prst="rect">
             <a:avLst/>
@@ -17412,6 +17809,11 @@
             <a:noAutofit/>
           </a:bodyPr>
           <a:p>
+            <a:pPr>
+              <a:lnSpc>
+                <a:spcPct val="100000"/>
+              </a:lnSpc>
+            </a:pPr>
             <a:endParaRPr b="0" lang="en-US" sz="1800" spc="-1" strike="noStrike">
               <a:solidFill>
                 <a:srgbClr val="000000"/>
@@ -17430,7 +17832,7 @@
         <p:spPr>
           <a:xfrm>
             <a:off x="4480560" y="777240"/>
-            <a:ext cx="1965600" cy="54360"/>
+            <a:ext cx="1965240" cy="54000"/>
           </a:xfrm>
           <a:prstGeom prst="rect">
             <a:avLst/>
@@ -17456,6 +17858,11 @@
             <a:noAutofit/>
           </a:bodyPr>
           <a:p>
+            <a:pPr>
+              <a:lnSpc>
+                <a:spcPct val="100000"/>
+              </a:lnSpc>
+            </a:pPr>
             <a:endParaRPr b="0" lang="en-US" sz="1800" spc="-1" strike="noStrike">
               <a:solidFill>
                 <a:srgbClr val="ffffff"/>
@@ -17474,7 +17881,7 @@
         <p:spPr>
           <a:xfrm>
             <a:off x="4480560" y="887040"/>
-            <a:ext cx="1965600" cy="603000"/>
+            <a:ext cx="1965240" cy="602640"/>
           </a:xfrm>
           <a:prstGeom prst="rect">
             <a:avLst/>
@@ -17531,7 +17938,7 @@
         <p:spPr>
           <a:xfrm>
             <a:off x="4572000" y="1457640"/>
-            <a:ext cx="1782720" cy="383760"/>
+            <a:ext cx="1782360" cy="383400"/>
           </a:xfrm>
           <a:prstGeom prst="rect">
             <a:avLst/>
@@ -17588,7 +17995,7 @@
         <p:spPr>
           <a:xfrm>
             <a:off x="6583680" y="777240"/>
-            <a:ext cx="1965600" cy="1096920"/>
+            <a:ext cx="1965240" cy="1096560"/>
           </a:xfrm>
           <a:prstGeom prst="rect">
             <a:avLst/>
@@ -17621,6 +18028,11 @@
             <a:noAutofit/>
           </a:bodyPr>
           <a:p>
+            <a:pPr>
+              <a:lnSpc>
+                <a:spcPct val="100000"/>
+              </a:lnSpc>
+            </a:pPr>
             <a:endParaRPr b="0" lang="en-US" sz="1800" spc="-1" strike="noStrike">
               <a:solidFill>
                 <a:srgbClr val="000000"/>
@@ -17639,7 +18051,7 @@
         <p:spPr>
           <a:xfrm>
             <a:off x="6583680" y="777240"/>
-            <a:ext cx="1965600" cy="54360"/>
+            <a:ext cx="1965240" cy="54000"/>
           </a:xfrm>
           <a:prstGeom prst="rect">
             <a:avLst/>
@@ -17665,6 +18077,11 @@
             <a:noAutofit/>
           </a:bodyPr>
           <a:p>
+            <a:pPr>
+              <a:lnSpc>
+                <a:spcPct val="100000"/>
+              </a:lnSpc>
+            </a:pPr>
             <a:endParaRPr b="0" lang="en-US" sz="1800" spc="-1" strike="noStrike">
               <a:solidFill>
                 <a:srgbClr val="ffffff"/>
@@ -17683,7 +18100,7 @@
         <p:spPr>
           <a:xfrm>
             <a:off x="6583680" y="887040"/>
-            <a:ext cx="1965600" cy="603000"/>
+            <a:ext cx="1965240" cy="602640"/>
           </a:xfrm>
           <a:prstGeom prst="rect">
             <a:avLst/>
@@ -17740,7 +18157,7 @@
         <p:spPr>
           <a:xfrm>
             <a:off x="6675120" y="1457640"/>
-            <a:ext cx="1782720" cy="383760"/>
+            <a:ext cx="1782360" cy="383400"/>
           </a:xfrm>
           <a:prstGeom prst="rect">
             <a:avLst/>
@@ -17796,7 +18213,7 @@
         </p:nvGraphicFramePr>
         <p:xfrm>
           <a:off x="274320" y="2011680"/>
-          <a:ext cx="4114440" cy="1828440"/>
+          <a:ext cx="4114080" cy="1828080"/>
         </p:xfrm>
         <a:graphic>
           <a:graphicData uri="http://schemas.openxmlformats.org/drawingml/2006/chart">
@@ -17813,7 +18230,7 @@
         <p:spPr>
           <a:xfrm>
             <a:off x="4572000" y="2011680"/>
-            <a:ext cx="4297320" cy="1828440"/>
+            <a:ext cx="4296960" cy="1828080"/>
           </a:xfrm>
           <a:prstGeom prst="rect">
             <a:avLst/>
@@ -17846,6 +18263,11 @@
             <a:noAutofit/>
           </a:bodyPr>
           <a:p>
+            <a:pPr>
+              <a:lnSpc>
+                <a:spcPct val="100000"/>
+              </a:lnSpc>
+            </a:pPr>
             <a:endParaRPr b="0" lang="en-US" sz="1800" spc="-1" strike="noStrike">
               <a:solidFill>
                 <a:srgbClr val="000000"/>
@@ -17864,7 +18286,7 @@
         <p:spPr>
           <a:xfrm>
             <a:off x="4572000" y="2011680"/>
-            <a:ext cx="4297320" cy="54360"/>
+            <a:ext cx="4296960" cy="54000"/>
           </a:xfrm>
           <a:prstGeom prst="rect">
             <a:avLst/>
@@ -17890,6 +18312,11 @@
             <a:noAutofit/>
           </a:bodyPr>
           <a:p>
+            <a:pPr>
+              <a:lnSpc>
+                <a:spcPct val="100000"/>
+              </a:lnSpc>
+            </a:pPr>
             <a:endParaRPr b="0" lang="en-US" sz="1800" spc="-1" strike="noStrike">
               <a:solidFill>
                 <a:srgbClr val="ffffff"/>
@@ -17908,7 +18335,7 @@
         <p:spPr>
           <a:xfrm>
             <a:off x="4663440" y="2084760"/>
-            <a:ext cx="4114440" cy="319680"/>
+            <a:ext cx="4114080" cy="319320"/>
           </a:xfrm>
           <a:prstGeom prst="rect">
             <a:avLst/>
@@ -17965,7 +18392,7 @@
         <p:spPr>
           <a:xfrm>
             <a:off x="4663440" y="2487240"/>
-            <a:ext cx="2468520" cy="328680"/>
+            <a:ext cx="2468160" cy="328320"/>
           </a:xfrm>
           <a:prstGeom prst="rect">
             <a:avLst/>
@@ -17991,6 +18418,11 @@
             <a:noAutofit/>
           </a:bodyPr>
           <a:p>
+            <a:pPr>
+              <a:lnSpc>
+                <a:spcPct val="100000"/>
+              </a:lnSpc>
+            </a:pPr>
             <a:endParaRPr b="0" lang="en-US" sz="1800" spc="-1" strike="noStrike">
               <a:solidFill>
                 <a:srgbClr val="000000"/>
@@ -18009,7 +18441,7 @@
         <p:spPr>
           <a:xfrm>
             <a:off x="4736520" y="2487240"/>
-            <a:ext cx="2322360" cy="328680"/>
+            <a:ext cx="2322000" cy="328320"/>
           </a:xfrm>
           <a:prstGeom prst="rect">
             <a:avLst/>
@@ -18066,7 +18498,7 @@
         <p:spPr>
           <a:xfrm>
             <a:off x="7178040" y="2487240"/>
-            <a:ext cx="1599840" cy="328680"/>
+            <a:ext cx="1599480" cy="328320"/>
           </a:xfrm>
           <a:prstGeom prst="rect">
             <a:avLst/>
@@ -18092,6 +18524,11 @@
             <a:noAutofit/>
           </a:bodyPr>
           <a:p>
+            <a:pPr>
+              <a:lnSpc>
+                <a:spcPct val="100000"/>
+              </a:lnSpc>
+            </a:pPr>
             <a:endParaRPr b="0" lang="en-US" sz="1800" spc="-1" strike="noStrike">
               <a:solidFill>
                 <a:srgbClr val="ffffff"/>
@@ -18110,7 +18547,7 @@
         <p:spPr>
           <a:xfrm>
             <a:off x="7178040" y="2487240"/>
-            <a:ext cx="1599840" cy="328680"/>
+            <a:ext cx="1599480" cy="328320"/>
           </a:xfrm>
           <a:prstGeom prst="rect">
             <a:avLst/>
@@ -18167,7 +18604,7 @@
         <p:spPr>
           <a:xfrm>
             <a:off x="4663440" y="2889360"/>
-            <a:ext cx="2468520" cy="328680"/>
+            <a:ext cx="2468160" cy="328320"/>
           </a:xfrm>
           <a:prstGeom prst="rect">
             <a:avLst/>
@@ -18193,6 +18630,11 @@
             <a:noAutofit/>
           </a:bodyPr>
           <a:p>
+            <a:pPr>
+              <a:lnSpc>
+                <a:spcPct val="100000"/>
+              </a:lnSpc>
+            </a:pPr>
             <a:endParaRPr b="0" lang="en-US" sz="1800" spc="-1" strike="noStrike">
               <a:solidFill>
                 <a:srgbClr val="000000"/>
@@ -18211,7 +18653,7 @@
         <p:spPr>
           <a:xfrm>
             <a:off x="4736520" y="2889360"/>
-            <a:ext cx="2322360" cy="328680"/>
+            <a:ext cx="2322000" cy="328320"/>
           </a:xfrm>
           <a:prstGeom prst="rect">
             <a:avLst/>
@@ -18268,7 +18710,7 @@
         <p:spPr>
           <a:xfrm>
             <a:off x="7178040" y="2889360"/>
-            <a:ext cx="1599840" cy="328680"/>
+            <a:ext cx="1599480" cy="328320"/>
           </a:xfrm>
           <a:prstGeom prst="rect">
             <a:avLst/>
@@ -18294,6 +18736,11 @@
             <a:noAutofit/>
           </a:bodyPr>
           <a:p>
+            <a:pPr>
+              <a:lnSpc>
+                <a:spcPct val="100000"/>
+              </a:lnSpc>
+            </a:pPr>
             <a:endParaRPr b="0" lang="en-US" sz="1800" spc="-1" strike="noStrike">
               <a:solidFill>
                 <a:srgbClr val="ffffff"/>
@@ -18312,7 +18759,7 @@
         <p:spPr>
           <a:xfrm>
             <a:off x="7178040" y="2889360"/>
-            <a:ext cx="1599840" cy="328680"/>
+            <a:ext cx="1599480" cy="328320"/>
           </a:xfrm>
           <a:prstGeom prst="rect">
             <a:avLst/>
@@ -18369,7 +18816,7 @@
         <p:spPr>
           <a:xfrm>
             <a:off x="4663440" y="3291840"/>
-            <a:ext cx="2468520" cy="328680"/>
+            <a:ext cx="2468160" cy="328320"/>
           </a:xfrm>
           <a:prstGeom prst="rect">
             <a:avLst/>
@@ -18395,6 +18842,11 @@
             <a:noAutofit/>
           </a:bodyPr>
           <a:p>
+            <a:pPr>
+              <a:lnSpc>
+                <a:spcPct val="100000"/>
+              </a:lnSpc>
+            </a:pPr>
             <a:endParaRPr b="0" lang="en-US" sz="1800" spc="-1" strike="noStrike">
               <a:solidFill>
                 <a:srgbClr val="000000"/>
@@ -18413,7 +18865,7 @@
         <p:spPr>
           <a:xfrm>
             <a:off x="4736520" y="3291840"/>
-            <a:ext cx="2322360" cy="328680"/>
+            <a:ext cx="2322000" cy="328320"/>
           </a:xfrm>
           <a:prstGeom prst="rect">
             <a:avLst/>
@@ -18470,7 +18922,7 @@
         <p:spPr>
           <a:xfrm>
             <a:off x="7178040" y="3291840"/>
-            <a:ext cx="1599840" cy="328680"/>
+            <a:ext cx="1599480" cy="328320"/>
           </a:xfrm>
           <a:prstGeom prst="rect">
             <a:avLst/>
@@ -18496,6 +18948,11 @@
             <a:noAutofit/>
           </a:bodyPr>
           <a:p>
+            <a:pPr>
+              <a:lnSpc>
+                <a:spcPct val="100000"/>
+              </a:lnSpc>
+            </a:pPr>
             <a:endParaRPr b="0" lang="en-US" sz="1800" spc="-1" strike="noStrike">
               <a:solidFill>
                 <a:srgbClr val="ffffff"/>
@@ -18514,7 +18971,7 @@
         <p:spPr>
           <a:xfrm>
             <a:off x="7178040" y="3291840"/>
-            <a:ext cx="1599840" cy="328680"/>
+            <a:ext cx="1599480" cy="328320"/>
           </a:xfrm>
           <a:prstGeom prst="rect">
             <a:avLst/>
@@ -18571,7 +19028,7 @@
         <p:spPr>
           <a:xfrm>
             <a:off x="4663440" y="3712320"/>
-            <a:ext cx="4114440" cy="273960"/>
+            <a:ext cx="4114080" cy="273600"/>
           </a:xfrm>
           <a:prstGeom prst="rect">
             <a:avLst/>
@@ -18628,7 +19085,7 @@
         <p:spPr>
           <a:xfrm>
             <a:off x="274320" y="3977640"/>
-            <a:ext cx="8595000" cy="959760"/>
+            <a:ext cx="8594640" cy="959400"/>
           </a:xfrm>
           <a:prstGeom prst="rect">
             <a:avLst/>
@@ -18661,6 +19118,11 @@
             <a:noAutofit/>
           </a:bodyPr>
           <a:p>
+            <a:pPr>
+              <a:lnSpc>
+                <a:spcPct val="100000"/>
+              </a:lnSpc>
+            </a:pPr>
             <a:endParaRPr b="0" lang="en-US" sz="1800" spc="-1" strike="noStrike">
               <a:solidFill>
                 <a:srgbClr val="ffffff"/>
@@ -18679,7 +19141,7 @@
         <p:spPr>
           <a:xfrm>
             <a:off x="457200" y="4069080"/>
-            <a:ext cx="8320680" cy="776880"/>
+            <a:ext cx="8320320" cy="776520"/>
           </a:xfrm>
           <a:prstGeom prst="rect">
             <a:avLst/>
@@ -18783,7 +19245,7 @@
         <p:spPr>
           <a:xfrm>
             <a:off x="0" y="0"/>
-            <a:ext cx="9143640" cy="658080"/>
+            <a:ext cx="9143280" cy="657720"/>
           </a:xfrm>
           <a:prstGeom prst="rect">
             <a:avLst/>
@@ -18809,6 +19271,11 @@
             <a:noAutofit/>
           </a:bodyPr>
           <a:p>
+            <a:pPr>
+              <a:lnSpc>
+                <a:spcPct val="100000"/>
+              </a:lnSpc>
+            </a:pPr>
             <a:endParaRPr b="0" lang="en-US" sz="1800" spc="-1" strike="noStrike">
               <a:solidFill>
                 <a:srgbClr val="ffffff"/>
@@ -18827,7 +19294,7 @@
         <p:spPr>
           <a:xfrm>
             <a:off x="365760" y="0"/>
-            <a:ext cx="6857640" cy="658080"/>
+            <a:ext cx="6857280" cy="657720"/>
           </a:xfrm>
           <a:prstGeom prst="rect">
             <a:avLst/>
@@ -18884,7 +19351,7 @@
         <p:spPr>
           <a:xfrm>
             <a:off x="0" y="0"/>
-            <a:ext cx="8777880" cy="658080"/>
+            <a:ext cx="8777520" cy="657720"/>
           </a:xfrm>
           <a:prstGeom prst="rect">
             <a:avLst/>
@@ -18941,7 +19408,7 @@
         <p:spPr>
           <a:xfrm>
             <a:off x="0" y="4864680"/>
-            <a:ext cx="9143640" cy="273960"/>
+            <a:ext cx="9143280" cy="273600"/>
           </a:xfrm>
           <a:prstGeom prst="rect">
             <a:avLst/>
@@ -18998,7 +19465,7 @@
         <p:spPr>
           <a:xfrm>
             <a:off x="274320" y="822960"/>
-            <a:ext cx="8595000" cy="694440"/>
+            <a:ext cx="8594640" cy="694080"/>
           </a:xfrm>
           <a:prstGeom prst="rect">
             <a:avLst/>
@@ -19031,6 +19498,11 @@
             <a:noAutofit/>
           </a:bodyPr>
           <a:p>
+            <a:pPr>
+              <a:lnSpc>
+                <a:spcPct val="100000"/>
+              </a:lnSpc>
+            </a:pPr>
             <a:endParaRPr b="0" lang="en-US" sz="1800" spc="-1" strike="noStrike">
               <a:solidFill>
                 <a:srgbClr val="000000"/>
@@ -19049,7 +19521,7 @@
         <p:spPr>
           <a:xfrm>
             <a:off x="274320" y="822960"/>
-            <a:ext cx="72720" cy="694440"/>
+            <a:ext cx="72360" cy="694080"/>
           </a:xfrm>
           <a:prstGeom prst="rect">
             <a:avLst/>
@@ -19075,6 +19547,11 @@
             <a:noAutofit/>
           </a:bodyPr>
           <a:p>
+            <a:pPr>
+              <a:lnSpc>
+                <a:spcPct val="100000"/>
+              </a:lnSpc>
+            </a:pPr>
             <a:endParaRPr b="0" lang="en-US" sz="1800" spc="-1" strike="noStrike">
               <a:solidFill>
                 <a:srgbClr val="ffffff"/>
@@ -19093,7 +19570,7 @@
         <p:spPr>
           <a:xfrm>
             <a:off x="502920" y="859680"/>
-            <a:ext cx="2559960" cy="273960"/>
+            <a:ext cx="2559600" cy="273600"/>
           </a:xfrm>
           <a:prstGeom prst="rect">
             <a:avLst/>
@@ -19150,7 +19627,7 @@
         <p:spPr>
           <a:xfrm>
             <a:off x="502920" y="1170360"/>
-            <a:ext cx="2559960" cy="255600"/>
+            <a:ext cx="2559600" cy="255240"/>
           </a:xfrm>
           <a:prstGeom prst="rect">
             <a:avLst/>
@@ -19207,7 +19684,7 @@
         <p:spPr>
           <a:xfrm>
             <a:off x="3154680" y="859680"/>
-            <a:ext cx="548280" cy="255600"/>
+            <a:ext cx="547920" cy="255240"/>
           </a:xfrm>
           <a:prstGeom prst="rect">
             <a:avLst/>
@@ -19264,7 +19741,7 @@
         <p:spPr>
           <a:xfrm>
             <a:off x="3154680" y="1024200"/>
-            <a:ext cx="365400" cy="365400"/>
+            <a:ext cx="365040" cy="365040"/>
           </a:xfrm>
           <a:prstGeom prst="rect">
             <a:avLst/>
@@ -19321,7 +19798,7 @@
         <p:spPr>
           <a:xfrm>
             <a:off x="3611880" y="859680"/>
-            <a:ext cx="456840" cy="255600"/>
+            <a:ext cx="456480" cy="255240"/>
           </a:xfrm>
           <a:prstGeom prst="rect">
             <a:avLst/>
@@ -19378,7 +19855,7 @@
         <p:spPr>
           <a:xfrm>
             <a:off x="3611880" y="1097280"/>
-            <a:ext cx="5166000" cy="347040"/>
+            <a:ext cx="5165640" cy="346680"/>
           </a:xfrm>
           <a:prstGeom prst="rect">
             <a:avLst/>
@@ -19435,7 +19912,7 @@
         <p:spPr>
           <a:xfrm>
             <a:off x="274320" y="1609200"/>
-            <a:ext cx="8595000" cy="694440"/>
+            <a:ext cx="8594640" cy="694080"/>
           </a:xfrm>
           <a:prstGeom prst="rect">
             <a:avLst/>
@@ -19468,6 +19945,11 @@
             <a:noAutofit/>
           </a:bodyPr>
           <a:p>
+            <a:pPr>
+              <a:lnSpc>
+                <a:spcPct val="100000"/>
+              </a:lnSpc>
+            </a:pPr>
             <a:endParaRPr b="0" lang="en-US" sz="1800" spc="-1" strike="noStrike">
               <a:solidFill>
                 <a:srgbClr val="000000"/>
@@ -19486,7 +19968,7 @@
         <p:spPr>
           <a:xfrm>
             <a:off x="274320" y="1609200"/>
-            <a:ext cx="72720" cy="694440"/>
+            <a:ext cx="72360" cy="694080"/>
           </a:xfrm>
           <a:prstGeom prst="rect">
             <a:avLst/>
@@ -19512,6 +19994,11 @@
             <a:noAutofit/>
           </a:bodyPr>
           <a:p>
+            <a:pPr>
+              <a:lnSpc>
+                <a:spcPct val="100000"/>
+              </a:lnSpc>
+            </a:pPr>
             <a:endParaRPr b="0" lang="en-US" sz="1800" spc="-1" strike="noStrike">
               <a:solidFill>
                 <a:srgbClr val="ffffff"/>
@@ -19530,7 +20017,7 @@
         <p:spPr>
           <a:xfrm>
             <a:off x="502920" y="1645920"/>
-            <a:ext cx="2559960" cy="273960"/>
+            <a:ext cx="2559600" cy="273600"/>
           </a:xfrm>
           <a:prstGeom prst="rect">
             <a:avLst/>
@@ -19587,7 +20074,7 @@
         <p:spPr>
           <a:xfrm>
             <a:off x="502920" y="1956960"/>
-            <a:ext cx="2559960" cy="255600"/>
+            <a:ext cx="2559600" cy="255240"/>
           </a:xfrm>
           <a:prstGeom prst="rect">
             <a:avLst/>
@@ -19644,7 +20131,7 @@
         <p:spPr>
           <a:xfrm>
             <a:off x="3154680" y="1645920"/>
-            <a:ext cx="548280" cy="255600"/>
+            <a:ext cx="547920" cy="255240"/>
           </a:xfrm>
           <a:prstGeom prst="rect">
             <a:avLst/>
@@ -19701,7 +20188,7 @@
         <p:spPr>
           <a:xfrm>
             <a:off x="3154680" y="1810440"/>
-            <a:ext cx="365400" cy="365400"/>
+            <a:ext cx="365040" cy="365040"/>
           </a:xfrm>
           <a:prstGeom prst="rect">
             <a:avLst/>
@@ -19758,7 +20245,7 @@
         <p:spPr>
           <a:xfrm>
             <a:off x="3611880" y="1645920"/>
-            <a:ext cx="456840" cy="255600"/>
+            <a:ext cx="456480" cy="255240"/>
           </a:xfrm>
           <a:prstGeom prst="rect">
             <a:avLst/>
@@ -19815,7 +20302,7 @@
         <p:spPr>
           <a:xfrm>
             <a:off x="3611880" y="1883520"/>
-            <a:ext cx="5166000" cy="347040"/>
+            <a:ext cx="5165640" cy="346680"/>
           </a:xfrm>
           <a:prstGeom prst="rect">
             <a:avLst/>
@@ -19872,7 +20359,7 @@
         <p:spPr>
           <a:xfrm>
             <a:off x="274320" y="2395800"/>
-            <a:ext cx="8595000" cy="694440"/>
+            <a:ext cx="8594640" cy="694080"/>
           </a:xfrm>
           <a:prstGeom prst="rect">
             <a:avLst/>
@@ -19905,6 +20392,11 @@
             <a:noAutofit/>
           </a:bodyPr>
           <a:p>
+            <a:pPr>
+              <a:lnSpc>
+                <a:spcPct val="100000"/>
+              </a:lnSpc>
+            </a:pPr>
             <a:endParaRPr b="0" lang="en-US" sz="1800" spc="-1" strike="noStrike">
               <a:solidFill>
                 <a:srgbClr val="000000"/>
@@ -19923,7 +20415,7 @@
         <p:spPr>
           <a:xfrm>
             <a:off x="274320" y="2395800"/>
-            <a:ext cx="72720" cy="694440"/>
+            <a:ext cx="72360" cy="694080"/>
           </a:xfrm>
           <a:prstGeom prst="rect">
             <a:avLst/>
@@ -19949,6 +20441,11 @@
             <a:noAutofit/>
           </a:bodyPr>
           <a:p>
+            <a:pPr>
+              <a:lnSpc>
+                <a:spcPct val="100000"/>
+              </a:lnSpc>
+            </a:pPr>
             <a:endParaRPr b="0" lang="en-US" sz="1800" spc="-1" strike="noStrike">
               <a:solidFill>
                 <a:srgbClr val="ffffff"/>
@@ -19967,7 +20464,7 @@
         <p:spPr>
           <a:xfrm>
             <a:off x="502920" y="2432160"/>
-            <a:ext cx="2559960" cy="273960"/>
+            <a:ext cx="2559600" cy="273600"/>
           </a:xfrm>
           <a:prstGeom prst="rect">
             <a:avLst/>
@@ -20024,7 +20521,7 @@
         <p:spPr>
           <a:xfrm>
             <a:off x="502920" y="2743200"/>
-            <a:ext cx="2559960" cy="255600"/>
+            <a:ext cx="2559600" cy="255240"/>
           </a:xfrm>
           <a:prstGeom prst="rect">
             <a:avLst/>
@@ -20081,7 +20578,7 @@
         <p:spPr>
           <a:xfrm>
             <a:off x="3154680" y="2432160"/>
-            <a:ext cx="548280" cy="255600"/>
+            <a:ext cx="547920" cy="255240"/>
           </a:xfrm>
           <a:prstGeom prst="rect">
             <a:avLst/>
@@ -20138,7 +20635,7 @@
         <p:spPr>
           <a:xfrm>
             <a:off x="3154680" y="2597040"/>
-            <a:ext cx="365400" cy="365400"/>
+            <a:ext cx="365040" cy="365040"/>
           </a:xfrm>
           <a:prstGeom prst="rect">
             <a:avLst/>
@@ -20195,7 +20692,7 @@
         <p:spPr>
           <a:xfrm>
             <a:off x="3611880" y="2432160"/>
-            <a:ext cx="456840" cy="255600"/>
+            <a:ext cx="456480" cy="255240"/>
           </a:xfrm>
           <a:prstGeom prst="rect">
             <a:avLst/>
@@ -20252,7 +20749,7 @@
         <p:spPr>
           <a:xfrm>
             <a:off x="3611880" y="2670120"/>
-            <a:ext cx="5166000" cy="347040"/>
+            <a:ext cx="5165640" cy="346680"/>
           </a:xfrm>
           <a:prstGeom prst="rect">
             <a:avLst/>
@@ -20309,7 +20806,7 @@
         <p:spPr>
           <a:xfrm>
             <a:off x="274320" y="3182040"/>
-            <a:ext cx="8595000" cy="694440"/>
+            <a:ext cx="8594640" cy="694080"/>
           </a:xfrm>
           <a:prstGeom prst="rect">
             <a:avLst/>
@@ -20342,6 +20839,11 @@
             <a:noAutofit/>
           </a:bodyPr>
           <a:p>
+            <a:pPr>
+              <a:lnSpc>
+                <a:spcPct val="100000"/>
+              </a:lnSpc>
+            </a:pPr>
             <a:endParaRPr b="0" lang="en-US" sz="1800" spc="-1" strike="noStrike">
               <a:solidFill>
                 <a:srgbClr val="000000"/>
@@ -20360,7 +20862,7 @@
         <p:spPr>
           <a:xfrm>
             <a:off x="274320" y="3182040"/>
-            <a:ext cx="72720" cy="694440"/>
+            <a:ext cx="72360" cy="694080"/>
           </a:xfrm>
           <a:prstGeom prst="rect">
             <a:avLst/>
@@ -20386,6 +20888,11 @@
             <a:noAutofit/>
           </a:bodyPr>
           <a:p>
+            <a:pPr>
+              <a:lnSpc>
+                <a:spcPct val="100000"/>
+              </a:lnSpc>
+            </a:pPr>
             <a:endParaRPr b="0" lang="en-US" sz="1800" spc="-1" strike="noStrike">
               <a:solidFill>
                 <a:srgbClr val="000000"/>
@@ -20404,7 +20911,7 @@
         <p:spPr>
           <a:xfrm>
             <a:off x="502920" y="3218760"/>
-            <a:ext cx="2559960" cy="273960"/>
+            <a:ext cx="2559600" cy="273600"/>
           </a:xfrm>
           <a:prstGeom prst="rect">
             <a:avLst/>
@@ -20461,7 +20968,7 @@
         <p:spPr>
           <a:xfrm>
             <a:off x="502920" y="3529440"/>
-            <a:ext cx="2559960" cy="255600"/>
+            <a:ext cx="2559600" cy="255240"/>
           </a:xfrm>
           <a:prstGeom prst="rect">
             <a:avLst/>
@@ -20518,7 +21025,7 @@
         <p:spPr>
           <a:xfrm>
             <a:off x="3154680" y="3218760"/>
-            <a:ext cx="548280" cy="255600"/>
+            <a:ext cx="547920" cy="255240"/>
           </a:xfrm>
           <a:prstGeom prst="rect">
             <a:avLst/>
@@ -20575,7 +21082,7 @@
         <p:spPr>
           <a:xfrm>
             <a:off x="3154680" y="3383280"/>
-            <a:ext cx="365400" cy="365400"/>
+            <a:ext cx="365040" cy="365040"/>
           </a:xfrm>
           <a:prstGeom prst="rect">
             <a:avLst/>
@@ -20632,7 +21139,7 @@
         <p:spPr>
           <a:xfrm>
             <a:off x="3611880" y="3218760"/>
-            <a:ext cx="456840" cy="255600"/>
+            <a:ext cx="456480" cy="255240"/>
           </a:xfrm>
           <a:prstGeom prst="rect">
             <a:avLst/>
@@ -20689,7 +21196,7 @@
         <p:spPr>
           <a:xfrm>
             <a:off x="3611880" y="3456360"/>
-            <a:ext cx="5166000" cy="347040"/>
+            <a:ext cx="5165640" cy="346680"/>
           </a:xfrm>
           <a:prstGeom prst="rect">
             <a:avLst/>
@@ -20746,7 +21253,7 @@
         <p:spPr>
           <a:xfrm>
             <a:off x="274320" y="3968640"/>
-            <a:ext cx="8595000" cy="694440"/>
+            <a:ext cx="8594640" cy="694080"/>
           </a:xfrm>
           <a:prstGeom prst="rect">
             <a:avLst/>
@@ -20779,6 +21286,11 @@
             <a:noAutofit/>
           </a:bodyPr>
           <a:p>
+            <a:pPr>
+              <a:lnSpc>
+                <a:spcPct val="100000"/>
+              </a:lnSpc>
+            </a:pPr>
             <a:endParaRPr b="0" lang="en-US" sz="1800" spc="-1" strike="noStrike">
               <a:solidFill>
                 <a:srgbClr val="000000"/>
@@ -20797,7 +21309,7 @@
         <p:spPr>
           <a:xfrm>
             <a:off x="274320" y="3968640"/>
-            <a:ext cx="72720" cy="694440"/>
+            <a:ext cx="72360" cy="694080"/>
           </a:xfrm>
           <a:prstGeom prst="rect">
             <a:avLst/>
@@ -20823,6 +21335,11 @@
             <a:noAutofit/>
           </a:bodyPr>
           <a:p>
+            <a:pPr>
+              <a:lnSpc>
+                <a:spcPct val="100000"/>
+              </a:lnSpc>
+            </a:pPr>
             <a:endParaRPr b="0" lang="en-US" sz="1800" spc="-1" strike="noStrike">
               <a:solidFill>
                 <a:srgbClr val="ffffff"/>
@@ -20841,7 +21358,7 @@
         <p:spPr>
           <a:xfrm>
             <a:off x="502920" y="4005000"/>
-            <a:ext cx="2559960" cy="273960"/>
+            <a:ext cx="2559600" cy="273600"/>
           </a:xfrm>
           <a:prstGeom prst="rect">
             <a:avLst/>
@@ -20898,7 +21415,7 @@
         <p:spPr>
           <a:xfrm>
             <a:off x="502920" y="4316040"/>
-            <a:ext cx="2559960" cy="255600"/>
+            <a:ext cx="2559600" cy="255240"/>
           </a:xfrm>
           <a:prstGeom prst="rect">
             <a:avLst/>
@@ -20955,7 +21472,7 @@
         <p:spPr>
           <a:xfrm>
             <a:off x="3154680" y="4005000"/>
-            <a:ext cx="548280" cy="255600"/>
+            <a:ext cx="547920" cy="255240"/>
           </a:xfrm>
           <a:prstGeom prst="rect">
             <a:avLst/>
@@ -21012,7 +21529,7 @@
         <p:spPr>
           <a:xfrm>
             <a:off x="3154680" y="4169520"/>
-            <a:ext cx="365400" cy="365400"/>
+            <a:ext cx="365040" cy="365040"/>
           </a:xfrm>
           <a:prstGeom prst="rect">
             <a:avLst/>
@@ -21069,7 +21586,7 @@
         <p:spPr>
           <a:xfrm>
             <a:off x="3611880" y="4005000"/>
-            <a:ext cx="456840" cy="255600"/>
+            <a:ext cx="456480" cy="255240"/>
           </a:xfrm>
           <a:prstGeom prst="rect">
             <a:avLst/>
@@ -21126,7 +21643,7 @@
         <p:spPr>
           <a:xfrm>
             <a:off x="3611880" y="4242960"/>
-            <a:ext cx="5166000" cy="347040"/>
+            <a:ext cx="5165640" cy="346680"/>
           </a:xfrm>
           <a:prstGeom prst="rect">
             <a:avLst/>
